--- a/artifacts/semantic_revision_20261022/pptx/Figure14_Semantic.pptx
+++ b/artifacts/semantic_revision_20261022/pptx/Figure14_Semantic.pptx
@@ -3586,6 +3586,10 @@
                   <a:round/>
                 </a:ln>
               </p:spPr>
+              <p:txBody xmlns:a="http://schemas.openxmlformats.org/drawingml/2006/main">
+                <a:bodyPr/>
+                <a:p/>
+              </p:txBody>
             </p:sp>
             <p:sp>
               <p:nvSpPr>
@@ -3663,6 +3667,10 @@
                   <a:round/>
                 </a:ln>
               </p:spPr>
+              <p:txBody xmlns:a="http://schemas.openxmlformats.org/drawingml/2006/main">
+                <a:bodyPr/>
+                <a:p/>
+              </p:txBody>
             </p:sp>
             <p:sp>
               <p:nvSpPr>
@@ -3731,6 +3739,10 @@
                   <a:round/>
                 </a:ln>
               </p:spPr>
+              <p:txBody xmlns:a="http://schemas.openxmlformats.org/drawingml/2006/main">
+                <a:bodyPr/>
+                <a:p/>
+              </p:txBody>
             </p:sp>
           </p:grpSp>
           <p:sp>
@@ -3882,7 +3894,7 @@
                     <a:solidFill>
                       <a:srgbClr val="24272A"/>
                     </a:solidFill>
-                    <a:latin typeface="Comic Sans MS"/>
+                    <a:latin typeface="Times New Roman"/>
                     <a:ea typeface="Comic Sans MS"/>
                     <a:cs typeface="Comic Sans MS"/>
                   </a:rPr>
@@ -4040,7 +4052,7 @@
                     <a:solidFill>
                       <a:srgbClr val="626A6F"/>
                     </a:solidFill>
-                    <a:latin typeface="Arial"/>
+                    <a:latin typeface="Times New Roman"/>
                     <a:ea typeface="Arial"/>
                     <a:cs typeface="Arial"/>
                   </a:rPr>
@@ -4086,6 +4098,10 @@
               <a:effectRef xmlns:a="http://schemas.openxmlformats.org/drawingml/2006/main" idx="10"/>
               <a:fontRef xmlns:a="http://schemas.openxmlformats.org/drawingml/2006/main" idx="major"/>
             </p:style>
+            <p:txBody xmlns:a="http://schemas.openxmlformats.org/drawingml/2006/main">
+              <a:bodyPr/>
+              <a:p/>
+            </p:txBody>
           </p:sp>
           <p:sp>
             <p:nvSpPr>
@@ -4236,7 +4252,7 @@
                     <a:solidFill>
                       <a:srgbClr val="24272A"/>
                     </a:solidFill>
-                    <a:latin typeface="Arial"/>
+                    <a:latin typeface="Times New Roman"/>
                     <a:ea typeface="Arial"/>
                     <a:cs typeface="Arial"/>
                   </a:rPr>
@@ -4291,6 +4307,10 @@
               <a:effectRef xmlns:a="http://schemas.openxmlformats.org/drawingml/2006/main" idx="11"/>
               <a:fontRef xmlns:a="http://schemas.openxmlformats.org/drawingml/2006/main" idx="major"/>
             </p:style>
+            <p:txBody xmlns:a="http://schemas.openxmlformats.org/drawingml/2006/main">
+              <a:bodyPr/>
+              <a:p/>
+            </p:txBody>
           </p:sp>
           <p:sp>
             <p:nvSpPr>
@@ -4338,6 +4358,10 @@
                 <a:round/>
               </a:ln>
             </p:spPr>
+            <p:txBody xmlns:a="http://schemas.openxmlformats.org/drawingml/2006/main">
+              <a:bodyPr/>
+              <a:p/>
+            </p:txBody>
           </p:sp>
           <p:sp>
             <p:nvSpPr>
@@ -4488,7 +4512,7 @@
                     <a:solidFill>
                       <a:srgbClr val="24272A"/>
                     </a:solidFill>
-                    <a:latin typeface="Arial"/>
+                    <a:latin typeface="Times New Roman"/>
                     <a:ea typeface="Arial"/>
                     <a:cs typeface="Arial"/>
                   </a:rPr>
@@ -4661,7 +4685,7 @@
                     <a:solidFill>
                       <a:srgbClr val="24272A"/>
                     </a:solidFill>
-                    <a:latin typeface="Comic Sans MS"/>
+                    <a:latin typeface="Times New Roman"/>
                     <a:ea typeface="Comic Sans MS"/>
                     <a:cs typeface="Comic Sans MS"/>
                   </a:rPr>
@@ -4749,6 +4773,10 @@
                   <a:round/>
                 </a:ln>
               </p:spPr>
+              <p:txBody xmlns:a="http://schemas.openxmlformats.org/drawingml/2006/main">
+                <a:bodyPr/>
+                <a:p/>
+              </p:txBody>
             </p:sp>
             <p:sp>
               <p:nvSpPr>
@@ -4815,6 +4843,10 @@
                   <a:round/>
                 </a:ln>
               </p:spPr>
+              <p:txBody xmlns:a="http://schemas.openxmlformats.org/drawingml/2006/main">
+                <a:bodyPr/>
+                <a:p/>
+              </p:txBody>
             </p:sp>
             <p:sp>
               <p:nvSpPr>
@@ -4856,6 +4888,10 @@
                   <a:round/>
                 </a:ln>
               </p:spPr>
+              <p:txBody xmlns:a="http://schemas.openxmlformats.org/drawingml/2006/main">
+                <a:bodyPr/>
+                <a:p/>
+              </p:txBody>
             </p:sp>
             <p:sp>
               <p:nvSpPr>
@@ -4897,6 +4933,10 @@
                   <a:round/>
                 </a:ln>
               </p:spPr>
+              <p:txBody xmlns:a="http://schemas.openxmlformats.org/drawingml/2006/main">
+                <a:bodyPr/>
+                <a:p/>
+              </p:txBody>
             </p:sp>
             <p:sp>
               <p:nvSpPr>
@@ -4941,6 +4981,10 @@
                   <a:round/>
                 </a:ln>
               </p:spPr>
+              <p:txBody xmlns:a="http://schemas.openxmlformats.org/drawingml/2006/main">
+                <a:bodyPr/>
+                <a:p/>
+              </p:txBody>
             </p:sp>
             <p:sp>
               <p:nvSpPr>
@@ -4985,6 +5029,10 @@
                   <a:round/>
                 </a:ln>
               </p:spPr>
+              <p:txBody xmlns:a="http://schemas.openxmlformats.org/drawingml/2006/main">
+                <a:bodyPr/>
+                <a:p/>
+              </p:txBody>
             </p:sp>
           </p:grpSp>
           <p:sp>
@@ -5136,7 +5184,7 @@
                     <a:solidFill>
                       <a:srgbClr val="24272A"/>
                     </a:solidFill>
-                    <a:latin typeface="Arial"/>
+                    <a:latin typeface="Times New Roman"/>
                     <a:ea typeface="Arial"/>
                     <a:cs typeface="Arial"/>
                   </a:rPr>
@@ -5178,6 +5226,10 @@
                 <a:round/>
               </a:ln>
             </p:spPr>
+            <p:txBody xmlns:a="http://schemas.openxmlformats.org/drawingml/2006/main">
+              <a:bodyPr/>
+              <a:p/>
+            </p:txBody>
           </p:sp>
           <p:sp>
             <p:nvSpPr>
@@ -5212,6 +5264,10 @@
                 <a:round/>
               </a:ln>
             </p:spPr>
+            <p:txBody xmlns:a="http://schemas.openxmlformats.org/drawingml/2006/main">
+              <a:bodyPr/>
+              <a:p/>
+            </p:txBody>
           </p:sp>
           <p:sp>
             <p:nvSpPr>
@@ -5246,6 +5302,10 @@
                 <a:round/>
               </a:ln>
             </p:spPr>
+            <p:txBody xmlns:a="http://schemas.openxmlformats.org/drawingml/2006/main">
+              <a:bodyPr/>
+              <a:p/>
+            </p:txBody>
           </p:sp>
           <p:sp>
             <p:nvSpPr>
@@ -5280,6 +5340,10 @@
                 <a:round/>
               </a:ln>
             </p:spPr>
+            <p:txBody xmlns:a="http://schemas.openxmlformats.org/drawingml/2006/main">
+              <a:bodyPr/>
+              <a:p/>
+            </p:txBody>
           </p:sp>
           <p:sp>
             <p:nvSpPr>
@@ -5314,6 +5378,10 @@
                 <a:round/>
               </a:ln>
             </p:spPr>
+            <p:txBody xmlns:a="http://schemas.openxmlformats.org/drawingml/2006/main">
+              <a:bodyPr/>
+              <a:p/>
+            </p:txBody>
           </p:sp>
           <p:sp>
             <p:nvSpPr>
@@ -5348,6 +5416,10 @@
                 <a:round/>
               </a:ln>
             </p:spPr>
+            <p:txBody xmlns:a="http://schemas.openxmlformats.org/drawingml/2006/main">
+              <a:bodyPr/>
+              <a:p/>
+            </p:txBody>
           </p:sp>
           <p:sp>
             <p:nvSpPr>
@@ -5382,6 +5454,10 @@
                 <a:round/>
               </a:ln>
             </p:spPr>
+            <p:txBody xmlns:a="http://schemas.openxmlformats.org/drawingml/2006/main">
+              <a:bodyPr/>
+              <a:p/>
+            </p:txBody>
           </p:sp>
           <p:sp>
             <p:nvSpPr>
@@ -5416,6 +5492,10 @@
                 <a:round/>
               </a:ln>
             </p:spPr>
+            <p:txBody xmlns:a="http://schemas.openxmlformats.org/drawingml/2006/main">
+              <a:bodyPr/>
+              <a:p/>
+            </p:txBody>
           </p:sp>
           <p:sp>
             <p:nvSpPr>
@@ -5450,6 +5530,10 @@
                 <a:round/>
               </a:ln>
             </p:spPr>
+            <p:txBody xmlns:a="http://schemas.openxmlformats.org/drawingml/2006/main">
+              <a:bodyPr/>
+              <a:p/>
+            </p:txBody>
           </p:sp>
           <p:sp>
             <p:nvSpPr>
@@ -5600,7 +5684,7 @@
                     <a:solidFill>
                       <a:srgbClr val="24272A"/>
                     </a:solidFill>
-                    <a:latin typeface="Arial"/>
+                    <a:latin typeface="Times New Roman"/>
                     <a:ea typeface="Arial"/>
                     <a:cs typeface="Arial"/>
                   </a:rPr>
@@ -5758,7 +5842,7 @@
                     <a:solidFill>
                       <a:srgbClr val="24272A"/>
                     </a:solidFill>
-                    <a:latin typeface="Arial"/>
+                    <a:latin typeface="Times New Roman"/>
                     <a:ea typeface="Arial"/>
                     <a:cs typeface="Arial"/>
                   </a:rPr>
@@ -5916,7 +6000,7 @@
                     <a:solidFill>
                       <a:srgbClr val="24272A"/>
                     </a:solidFill>
-                    <a:latin typeface="Arial"/>
+                    <a:latin typeface="Times New Roman"/>
                     <a:ea typeface="Arial"/>
                     <a:cs typeface="Arial"/>
                   </a:rPr>
@@ -6074,7 +6158,7 @@
                     <a:solidFill>
                       <a:srgbClr val="24272A"/>
                     </a:solidFill>
-                    <a:latin typeface="Arial"/>
+                    <a:latin typeface="Times New Roman"/>
                     <a:ea typeface="Arial"/>
                     <a:cs typeface="Arial"/>
                   </a:rPr>
@@ -6232,7 +6316,7 @@
                     <a:solidFill>
                       <a:srgbClr val="24272A"/>
                     </a:solidFill>
-                    <a:latin typeface="Arial"/>
+                    <a:latin typeface="Times New Roman"/>
                     <a:ea typeface="Arial"/>
                     <a:cs typeface="Arial"/>
                   </a:rPr>
@@ -6390,7 +6474,7 @@
                     <a:solidFill>
                       <a:srgbClr val="24272A"/>
                     </a:solidFill>
-                    <a:latin typeface="Arial"/>
+                    <a:latin typeface="Times New Roman"/>
                     <a:ea typeface="Arial"/>
                     <a:cs typeface="Arial"/>
                   </a:rPr>
@@ -6548,7 +6632,7 @@
                     <a:solidFill>
                       <a:srgbClr val="24272A"/>
                     </a:solidFill>
-                    <a:latin typeface="Arial"/>
+                    <a:latin typeface="Times New Roman"/>
                     <a:ea typeface="Arial"/>
                     <a:cs typeface="Arial"/>
                   </a:rPr>
@@ -6706,7 +6790,7 @@
                     <a:solidFill>
                       <a:srgbClr val="24272A"/>
                     </a:solidFill>
-                    <a:latin typeface="Arial"/>
+                    <a:latin typeface="Times New Roman"/>
                     <a:ea typeface="Arial"/>
                     <a:cs typeface="Arial"/>
                   </a:rPr>
@@ -6864,7 +6948,7 @@
                     <a:solidFill>
                       <a:srgbClr val="24272A"/>
                     </a:solidFill>
-                    <a:latin typeface="Arial"/>
+                    <a:latin typeface="Times New Roman"/>
                     <a:ea typeface="Arial"/>
                     <a:cs typeface="Arial"/>
                   </a:rPr>
@@ -7022,7 +7106,7 @@
                     <a:solidFill>
                       <a:srgbClr val="626A6F"/>
                     </a:solidFill>
-                    <a:latin typeface="Arial"/>
+                    <a:latin typeface="Times New Roman"/>
                     <a:ea typeface="Arial"/>
                     <a:cs typeface="Arial"/>
                   </a:rPr>
@@ -7195,7 +7279,7 @@
                     <a:solidFill>
                       <a:srgbClr val="24272A"/>
                     </a:solidFill>
-                    <a:latin typeface="Comic Sans MS"/>
+                    <a:latin typeface="Times New Roman"/>
                     <a:ea typeface="Comic Sans MS"/>
                     <a:cs typeface="Comic Sans MS"/>
                   </a:rPr>
@@ -7283,6 +7367,10 @@
                   <a:round/>
                 </a:ln>
               </p:spPr>
+              <p:txBody xmlns:a="http://schemas.openxmlformats.org/drawingml/2006/main">
+                <a:bodyPr/>
+                <a:p/>
+              </p:txBody>
             </p:sp>
             <p:sp>
               <p:nvSpPr>
@@ -7334,6 +7422,10 @@
                   <a:round/>
                 </a:ln>
               </p:spPr>
+              <p:txBody xmlns:a="http://schemas.openxmlformats.org/drawingml/2006/main">
+                <a:bodyPr/>
+                <a:p/>
+              </p:txBody>
             </p:sp>
             <p:sp>
               <p:nvSpPr>
@@ -7375,6 +7467,10 @@
                   <a:round/>
                 </a:ln>
               </p:spPr>
+              <p:txBody xmlns:a="http://schemas.openxmlformats.org/drawingml/2006/main">
+                <a:bodyPr/>
+                <a:p/>
+              </p:txBody>
             </p:sp>
           </p:grpSp>
           <p:sp>
@@ -7526,7 +7622,7 @@
                     <a:solidFill>
                       <a:srgbClr val="24272A"/>
                     </a:solidFill>
-                    <a:latin typeface="Arial"/>
+                    <a:latin typeface="Times New Roman"/>
                     <a:ea typeface="Arial"/>
                     <a:cs typeface="Arial"/>
                   </a:rPr>
@@ -7602,6 +7698,10 @@
                   <a:round/>
                 </a:ln>
               </p:spPr>
+              <p:txBody xmlns:a="http://schemas.openxmlformats.org/drawingml/2006/main">
+                <a:bodyPr/>
+                <a:p/>
+              </p:txBody>
             </p:sp>
             <p:sp>
               <p:nvSpPr>
@@ -7656,6 +7756,10 @@
                   <a:round/>
                 </a:ln>
               </p:spPr>
+              <p:txBody xmlns:a="http://schemas.openxmlformats.org/drawingml/2006/main">
+                <a:bodyPr/>
+                <a:p/>
+              </p:txBody>
             </p:sp>
           </p:grpSp>
           <p:sp>
@@ -7807,7 +7911,7 @@
                     <a:solidFill>
                       <a:srgbClr val="24272A"/>
                     </a:solidFill>
-                    <a:latin typeface="Arial"/>
+                    <a:latin typeface="Times New Roman"/>
                     <a:ea typeface="Arial"/>
                     <a:cs typeface="Arial"/>
                   </a:rPr>
@@ -7870,6 +7974,10 @@
                   <a:round/>
                 </a:ln>
               </p:spPr>
+              <p:txBody xmlns:a="http://schemas.openxmlformats.org/drawingml/2006/main">
+                <a:bodyPr/>
+                <a:p/>
+              </p:txBody>
             </p:sp>
             <p:sp>
               <p:nvSpPr>
@@ -7911,6 +8019,10 @@
                   <a:round/>
                 </a:ln>
               </p:spPr>
+              <p:txBody xmlns:a="http://schemas.openxmlformats.org/drawingml/2006/main">
+                <a:bodyPr/>
+                <a:p/>
+              </p:txBody>
             </p:sp>
             <p:sp>
               <p:nvSpPr>
@@ -7952,6 +8064,10 @@
                   <a:round/>
                 </a:ln>
               </p:spPr>
+              <p:txBody xmlns:a="http://schemas.openxmlformats.org/drawingml/2006/main">
+                <a:bodyPr/>
+                <a:p/>
+              </p:txBody>
             </p:sp>
             <p:sp>
               <p:nvSpPr>
@@ -7993,6 +8109,10 @@
                   <a:round/>
                 </a:ln>
               </p:spPr>
+              <p:txBody xmlns:a="http://schemas.openxmlformats.org/drawingml/2006/main">
+                <a:bodyPr/>
+                <a:p/>
+              </p:txBody>
             </p:sp>
             <p:sp>
               <p:nvSpPr>
@@ -8034,6 +8154,10 @@
                   <a:round/>
                 </a:ln>
               </p:spPr>
+              <p:txBody xmlns:a="http://schemas.openxmlformats.org/drawingml/2006/main">
+                <a:bodyPr/>
+                <a:p/>
+              </p:txBody>
             </p:sp>
             <p:sp>
               <p:nvSpPr>
@@ -8075,6 +8199,10 @@
                   <a:round/>
                 </a:ln>
               </p:spPr>
+              <p:txBody xmlns:a="http://schemas.openxmlformats.org/drawingml/2006/main">
+                <a:bodyPr/>
+                <a:p/>
+              </p:txBody>
             </p:sp>
             <p:sp>
               <p:nvSpPr>
@@ -8116,6 +8244,10 @@
                   <a:round/>
                 </a:ln>
               </p:spPr>
+              <p:txBody xmlns:a="http://schemas.openxmlformats.org/drawingml/2006/main">
+                <a:bodyPr/>
+                <a:p/>
+              </p:txBody>
             </p:sp>
             <p:sp>
               <p:nvSpPr>
@@ -8157,6 +8289,10 @@
                   <a:round/>
                 </a:ln>
               </p:spPr>
+              <p:txBody xmlns:a="http://schemas.openxmlformats.org/drawingml/2006/main">
+                <a:bodyPr/>
+                <a:p/>
+              </p:txBody>
             </p:sp>
             <p:sp>
               <p:nvSpPr>
@@ -8198,6 +8334,10 @@
                   <a:round/>
                 </a:ln>
               </p:spPr>
+              <p:txBody xmlns:a="http://schemas.openxmlformats.org/drawingml/2006/main">
+                <a:bodyPr/>
+                <a:p/>
+              </p:txBody>
             </p:sp>
           </p:grpSp>
           <p:sp>
@@ -8349,7 +8489,7 @@
                     <a:solidFill>
                       <a:srgbClr val="24272A"/>
                     </a:solidFill>
-                    <a:latin typeface="Arial"/>
+                    <a:latin typeface="Times New Roman"/>
                     <a:ea typeface="Arial"/>
                     <a:cs typeface="Arial"/>
                   </a:rPr>
@@ -8425,6 +8565,10 @@
                   <a:round/>
                 </a:ln>
               </p:spPr>
+              <p:txBody xmlns:a="http://schemas.openxmlformats.org/drawingml/2006/main">
+                <a:bodyPr/>
+                <a:p/>
+              </p:txBody>
             </p:sp>
             <p:sp>
               <p:nvSpPr>
@@ -8478,6 +8622,10 @@
                   <a:round/>
                 </a:ln>
               </p:spPr>
+              <p:txBody xmlns:a="http://schemas.openxmlformats.org/drawingml/2006/main">
+                <a:bodyPr/>
+                <a:p/>
+              </p:txBody>
             </p:sp>
           </p:grpSp>
           <p:sp>
@@ -8629,7 +8777,7 @@
                     <a:solidFill>
                       <a:srgbClr val="24272A"/>
                     </a:solidFill>
-                    <a:latin typeface="Arial"/>
+                    <a:latin typeface="Times New Roman"/>
                     <a:ea typeface="Arial"/>
                     <a:cs typeface="Arial"/>
                   </a:rPr>
@@ -8787,7 +8935,7 @@
                     <a:solidFill>
                       <a:srgbClr val="3F6C85"/>
                     </a:solidFill>
-                    <a:latin typeface="Arial"/>
+                    <a:latin typeface="Times New Roman"/>
                     <a:ea typeface="Arial"/>
                     <a:cs typeface="Arial"/>
                   </a:rPr>
@@ -8848,6 +8996,10 @@
               <a:effectRef xmlns:a="http://schemas.openxmlformats.org/drawingml/2006/main" idx="10"/>
               <a:fontRef xmlns:a="http://schemas.openxmlformats.org/drawingml/2006/main" idx="major"/>
             </p:style>
+            <p:txBody xmlns:a="http://schemas.openxmlformats.org/drawingml/2006/main">
+              <a:bodyPr/>
+              <a:p/>
+            </p:txBody>
           </p:sp>
           <p:sp>
             <p:nvSpPr>
@@ -8998,7 +9150,7 @@
                     <a:solidFill>
                       <a:srgbClr val="24272A"/>
                     </a:solidFill>
-                    <a:latin typeface="Comic Sans MS"/>
+                    <a:latin typeface="Times New Roman"/>
                     <a:ea typeface="Comic Sans MS"/>
                     <a:cs typeface="Comic Sans MS"/>
                   </a:rPr>
@@ -9073,6 +9225,10 @@
                   <a:round/>
                 </a:ln>
               </p:spPr>
+              <p:txBody xmlns:a="http://schemas.openxmlformats.org/drawingml/2006/main">
+                <a:bodyPr/>
+                <a:p/>
+              </p:txBody>
             </p:sp>
             <p:sp>
               <p:nvSpPr>
@@ -9116,6 +9272,10 @@
                   <a:round/>
                 </a:ln>
               </p:spPr>
+              <p:txBody xmlns:a="http://schemas.openxmlformats.org/drawingml/2006/main">
+                <a:bodyPr/>
+                <a:p/>
+              </p:txBody>
             </p:sp>
             <p:sp>
               <p:nvSpPr>
@@ -9159,6 +9319,10 @@
                   <a:round/>
                 </a:ln>
               </p:spPr>
+              <p:txBody xmlns:a="http://schemas.openxmlformats.org/drawingml/2006/main">
+                <a:bodyPr/>
+                <a:p/>
+              </p:txBody>
             </p:sp>
             <p:sp>
               <p:nvSpPr>
@@ -9212,6 +9376,10 @@
                   <a:round/>
                 </a:ln>
               </p:spPr>
+              <p:txBody xmlns:a="http://schemas.openxmlformats.org/drawingml/2006/main">
+                <a:bodyPr/>
+                <a:p/>
+              </p:txBody>
             </p:sp>
             <p:sp>
               <p:nvSpPr>
@@ -9253,6 +9421,10 @@
                   <a:round/>
                 </a:ln>
               </p:spPr>
+              <p:txBody xmlns:a="http://schemas.openxmlformats.org/drawingml/2006/main">
+                <a:bodyPr/>
+                <a:p/>
+              </p:txBody>
             </p:sp>
             <p:sp>
               <p:nvSpPr>
@@ -9296,6 +9468,10 @@
                   <a:round/>
                 </a:ln>
               </p:spPr>
+              <p:txBody xmlns:a="http://schemas.openxmlformats.org/drawingml/2006/main">
+                <a:bodyPr/>
+                <a:p/>
+              </p:txBody>
             </p:sp>
             <p:sp>
               <p:nvSpPr>
@@ -9344,6 +9520,10 @@
                   <a:round/>
                 </a:ln>
               </p:spPr>
+              <p:txBody xmlns:a="http://schemas.openxmlformats.org/drawingml/2006/main">
+                <a:bodyPr/>
+                <a:p/>
+              </p:txBody>
             </p:sp>
             <p:sp>
               <p:nvSpPr>
@@ -9387,6 +9567,10 @@
                   <a:round/>
                 </a:ln>
               </p:spPr>
+              <p:txBody xmlns:a="http://schemas.openxmlformats.org/drawingml/2006/main">
+                <a:bodyPr/>
+                <a:p/>
+              </p:txBody>
             </p:sp>
             <p:sp>
               <p:nvSpPr>
@@ -9443,6 +9627,10 @@
                   <a:round/>
                 </a:ln>
               </p:spPr>
+              <p:txBody xmlns:a="http://schemas.openxmlformats.org/drawingml/2006/main">
+                <a:bodyPr/>
+                <a:p/>
+              </p:txBody>
             </p:sp>
           </p:grpSp>
           <p:sp>
@@ -9594,7 +9782,7 @@
                     <a:solidFill>
                       <a:srgbClr val="24272A"/>
                     </a:solidFill>
-                    <a:latin typeface="Arial"/>
+                    <a:latin typeface="Times New Roman"/>
                     <a:ea typeface="Arial"/>
                     <a:cs typeface="Arial"/>
                   </a:rPr>
@@ -9752,7 +9940,7 @@
                     <a:solidFill>
                       <a:srgbClr val="626A6F"/>
                     </a:solidFill>
-                    <a:latin typeface="Arial"/>
+                    <a:latin typeface="Times New Roman"/>
                     <a:ea typeface="Arial"/>
                     <a:cs typeface="Arial"/>
                   </a:rPr>
@@ -9815,6 +10003,10 @@
                   <a:round/>
                 </a:ln>
               </p:spPr>
+              <p:txBody xmlns:a="http://schemas.openxmlformats.org/drawingml/2006/main">
+                <a:bodyPr/>
+                <a:p/>
+              </p:txBody>
             </p:sp>
             <p:sp>
               <p:nvSpPr>
@@ -9856,6 +10048,10 @@
                   <a:round/>
                 </a:ln>
               </p:spPr>
+              <p:txBody xmlns:a="http://schemas.openxmlformats.org/drawingml/2006/main">
+                <a:bodyPr/>
+                <a:p/>
+              </p:txBody>
             </p:sp>
             <p:sp>
               <p:nvSpPr>
@@ -9897,6 +10093,10 @@
                   <a:round/>
                 </a:ln>
               </p:spPr>
+              <p:txBody xmlns:a="http://schemas.openxmlformats.org/drawingml/2006/main">
+                <a:bodyPr/>
+                <a:p/>
+              </p:txBody>
             </p:sp>
             <p:sp>
               <p:nvSpPr>
@@ -9965,6 +10165,10 @@
                   <a:round/>
                 </a:ln>
               </p:spPr>
+              <p:txBody xmlns:a="http://schemas.openxmlformats.org/drawingml/2006/main">
+                <a:bodyPr/>
+                <a:p/>
+              </p:txBody>
             </p:sp>
             <p:sp>
               <p:nvSpPr>
@@ -10006,6 +10210,10 @@
                   <a:round/>
                 </a:ln>
               </p:spPr>
+              <p:txBody xmlns:a="http://schemas.openxmlformats.org/drawingml/2006/main">
+                <a:bodyPr/>
+                <a:p/>
+              </p:txBody>
             </p:sp>
           </p:grpSp>
           <p:sp>
@@ -10157,7 +10365,7 @@
                     <a:solidFill>
                       <a:srgbClr val="24272A"/>
                     </a:solidFill>
-                    <a:latin typeface="Arial"/>
+                    <a:latin typeface="Times New Roman"/>
                     <a:ea typeface="Arial"/>
                     <a:cs typeface="Arial"/>
                   </a:rPr>
@@ -10315,7 +10523,7 @@
                     <a:solidFill>
                       <a:srgbClr val="626A6F"/>
                     </a:solidFill>
-                    <a:latin typeface="Arial"/>
+                    <a:latin typeface="Times New Roman"/>
                     <a:ea typeface="Arial"/>
                     <a:cs typeface="Arial"/>
                   </a:rPr>
@@ -10370,6 +10578,10 @@
                 <a:round/>
               </a:ln>
             </p:spPr>
+            <p:txBody xmlns:a="http://schemas.openxmlformats.org/drawingml/2006/main">
+              <a:bodyPr/>
+              <a:p/>
+            </p:txBody>
           </p:sp>
           <p:sp>
             <p:nvSpPr>
@@ -10411,6 +10623,10 @@
                 <a:round/>
               </a:ln>
             </p:spPr>
+            <p:txBody xmlns:a="http://schemas.openxmlformats.org/drawingml/2006/main">
+              <a:bodyPr/>
+              <a:p/>
+            </p:txBody>
           </p:sp>
           <p:sp>
             <p:nvSpPr>
@@ -10458,6 +10674,10 @@
               <a:effectRef xmlns:a="http://schemas.openxmlformats.org/drawingml/2006/main" idx="11"/>
               <a:fontRef xmlns:a="http://schemas.openxmlformats.org/drawingml/2006/main" idx="major"/>
             </p:style>
+            <p:txBody xmlns:a="http://schemas.openxmlformats.org/drawingml/2006/main">
+              <a:bodyPr/>
+              <a:p/>
+            </p:txBody>
           </p:sp>
           <p:sp>
             <p:nvSpPr>
@@ -10505,6 +10725,10 @@
                 <a:round/>
               </a:ln>
             </p:spPr>
+            <p:txBody xmlns:a="http://schemas.openxmlformats.org/drawingml/2006/main">
+              <a:bodyPr/>
+              <a:p/>
+            </p:txBody>
           </p:sp>
           <p:sp>
             <p:nvSpPr>
@@ -10655,7 +10879,7 @@
                     <a:solidFill>
                       <a:srgbClr val="328372"/>
                     </a:solidFill>
-                    <a:latin typeface="Arial"/>
+                    <a:latin typeface="Times New Roman"/>
                     <a:ea typeface="Arial"/>
                     <a:cs typeface="Arial"/>
                   </a:rPr>
@@ -10704,6 +10928,10 @@
                 <a:round/>
               </a:ln>
             </p:spPr>
+            <p:txBody xmlns:a="http://schemas.openxmlformats.org/drawingml/2006/main">
+              <a:bodyPr/>
+              <a:p/>
+            </p:txBody>
           </p:sp>
           <p:grpSp>
             <p:nvGrpSpPr>
@@ -10762,6 +10990,10 @@
                   <a:round/>
                 </a:ln>
               </p:spPr>
+              <p:txBody xmlns:a="http://schemas.openxmlformats.org/drawingml/2006/main">
+                <a:bodyPr/>
+                <a:p/>
+              </p:txBody>
             </p:sp>
             <p:sp>
               <p:nvSpPr>
@@ -10806,6 +11038,10 @@
                   <a:round/>
                 </a:ln>
               </p:spPr>
+              <p:txBody xmlns:a="http://schemas.openxmlformats.org/drawingml/2006/main">
+                <a:bodyPr/>
+                <a:p/>
+              </p:txBody>
             </p:sp>
             <p:sp>
               <p:nvSpPr>
@@ -10850,6 +11086,10 @@
                   <a:round/>
                 </a:ln>
               </p:spPr>
+              <p:txBody xmlns:a="http://schemas.openxmlformats.org/drawingml/2006/main">
+                <a:bodyPr/>
+                <a:p/>
+              </p:txBody>
             </p:sp>
             <p:sp>
               <p:nvSpPr>
@@ -10894,6 +11134,10 @@
                   <a:round/>
                 </a:ln>
               </p:spPr>
+              <p:txBody xmlns:a="http://schemas.openxmlformats.org/drawingml/2006/main">
+                <a:bodyPr/>
+                <a:p/>
+              </p:txBody>
             </p:sp>
             <p:sp>
               <p:nvSpPr>
@@ -10938,6 +11182,10 @@
                   <a:round/>
                 </a:ln>
               </p:spPr>
+              <p:txBody xmlns:a="http://schemas.openxmlformats.org/drawingml/2006/main">
+                <a:bodyPr/>
+                <a:p/>
+              </p:txBody>
             </p:sp>
             <p:sp>
               <p:nvSpPr>
@@ -10982,6 +11230,10 @@
                   <a:round/>
                 </a:ln>
               </p:spPr>
+              <p:txBody xmlns:a="http://schemas.openxmlformats.org/drawingml/2006/main">
+                <a:bodyPr/>
+                <a:p/>
+              </p:txBody>
             </p:sp>
             <p:sp>
               <p:nvSpPr>
@@ -11026,6 +11278,10 @@
                   <a:round/>
                 </a:ln>
               </p:spPr>
+              <p:txBody xmlns:a="http://schemas.openxmlformats.org/drawingml/2006/main">
+                <a:bodyPr/>
+                <a:p/>
+              </p:txBody>
             </p:sp>
             <p:sp>
               <p:nvSpPr>
@@ -11070,6 +11326,10 @@
                   <a:round/>
                 </a:ln>
               </p:spPr>
+              <p:txBody xmlns:a="http://schemas.openxmlformats.org/drawingml/2006/main">
+                <a:bodyPr/>
+                <a:p/>
+              </p:txBody>
             </p:sp>
             <p:sp>
               <p:nvSpPr>
@@ -11114,6 +11374,10 @@
                   <a:round/>
                 </a:ln>
               </p:spPr>
+              <p:txBody xmlns:a="http://schemas.openxmlformats.org/drawingml/2006/main">
+                <a:bodyPr/>
+                <a:p/>
+              </p:txBody>
             </p:sp>
             <p:sp>
               <p:nvSpPr>
@@ -11158,6 +11422,10 @@
                   <a:round/>
                 </a:ln>
               </p:spPr>
+              <p:txBody xmlns:a="http://schemas.openxmlformats.org/drawingml/2006/main">
+                <a:bodyPr/>
+                <a:p/>
+              </p:txBody>
             </p:sp>
             <p:sp>
               <p:nvSpPr>
@@ -11202,6 +11470,10 @@
                   <a:round/>
                 </a:ln>
               </p:spPr>
+              <p:txBody xmlns:a="http://schemas.openxmlformats.org/drawingml/2006/main">
+                <a:bodyPr/>
+                <a:p/>
+              </p:txBody>
             </p:sp>
             <p:sp>
               <p:nvSpPr>
@@ -11246,6 +11518,10 @@
                   <a:round/>
                 </a:ln>
               </p:spPr>
+              <p:txBody xmlns:a="http://schemas.openxmlformats.org/drawingml/2006/main">
+                <a:bodyPr/>
+                <a:p/>
+              </p:txBody>
             </p:sp>
           </p:grpSp>
           <p:sp>
@@ -11397,7 +11673,7 @@
                     <a:solidFill>
                       <a:srgbClr val="24272A"/>
                     </a:solidFill>
-                    <a:latin typeface="Arial"/>
+                    <a:latin typeface="Times New Roman"/>
                     <a:ea typeface="Arial"/>
                     <a:cs typeface="Arial"/>
                   </a:rPr>
@@ -11452,6 +11728,10 @@
               <a:effectRef xmlns:a="http://schemas.openxmlformats.org/drawingml/2006/main" idx="11"/>
               <a:fontRef xmlns:a="http://schemas.openxmlformats.org/drawingml/2006/main" idx="major"/>
             </p:style>
+            <p:txBody xmlns:a="http://schemas.openxmlformats.org/drawingml/2006/main">
+              <a:bodyPr/>
+              <a:p/>
+            </p:txBody>
           </p:sp>
           <p:sp>
             <p:nvSpPr>
@@ -11499,6 +11779,10 @@
                 <a:round/>
               </a:ln>
             </p:spPr>
+            <p:txBody xmlns:a="http://schemas.openxmlformats.org/drawingml/2006/main">
+              <a:bodyPr/>
+              <a:p/>
+            </p:txBody>
           </p:sp>
           <p:grpSp>
             <p:nvGrpSpPr>
@@ -11649,6 +11933,10 @@
                   <a:round/>
                 </a:ln>
               </p:spPr>
+              <p:txBody xmlns:a="http://schemas.openxmlformats.org/drawingml/2006/main">
+                <a:bodyPr/>
+                <a:p/>
+              </p:txBody>
             </p:sp>
           </p:grpSp>
           <p:sp>
@@ -11800,7 +12088,7 @@
                     <a:solidFill>
                       <a:srgbClr val="24272A"/>
                     </a:solidFill>
-                    <a:latin typeface="Arial"/>
+                    <a:latin typeface="Times New Roman"/>
                     <a:ea typeface="Arial"/>
                     <a:cs typeface="Arial"/>
                   </a:rPr>
@@ -11958,7 +12246,7 @@
                     <a:solidFill>
                       <a:srgbClr val="626A6F"/>
                     </a:solidFill>
-                    <a:latin typeface="Arial"/>
+                    <a:latin typeface="Times New Roman"/>
                     <a:ea typeface="Arial"/>
                     <a:cs typeface="Arial"/>
                   </a:rPr>
@@ -12028,6 +12316,10 @@
               <a:effectRef xmlns:a="http://schemas.openxmlformats.org/drawingml/2006/main" idx="11"/>
               <a:fontRef xmlns:a="http://schemas.openxmlformats.org/drawingml/2006/main" idx="major"/>
             </p:style>
+            <p:txBody xmlns:a="http://schemas.openxmlformats.org/drawingml/2006/main">
+              <a:bodyPr/>
+              <a:p/>
+            </p:txBody>
           </p:sp>
           <p:sp>
             <p:nvSpPr>
@@ -12075,6 +12367,10 @@
                 <a:round/>
               </a:ln>
             </p:spPr>
+            <p:txBody xmlns:a="http://schemas.openxmlformats.org/drawingml/2006/main">
+              <a:bodyPr/>
+              <a:p/>
+            </p:txBody>
           </p:sp>
           <p:sp>
             <p:nvSpPr>
@@ -12225,7 +12521,7 @@
                     <a:solidFill>
                       <a:srgbClr val="836780"/>
                     </a:solidFill>
-                    <a:latin typeface="Arial"/>
+                    <a:latin typeface="Times New Roman"/>
                     <a:ea typeface="Arial"/>
                     <a:cs typeface="Arial"/>
                   </a:rPr>
@@ -12289,6 +12585,10 @@
               <a:effectRef xmlns:a="http://schemas.openxmlformats.org/drawingml/2006/main" idx="11"/>
               <a:fontRef xmlns:a="http://schemas.openxmlformats.org/drawingml/2006/main" idx="major"/>
             </p:style>
+            <p:txBody xmlns:a="http://schemas.openxmlformats.org/drawingml/2006/main">
+              <a:bodyPr/>
+              <a:p/>
+            </p:txBody>
           </p:sp>
           <p:sp>
             <p:nvSpPr>
@@ -12336,6 +12636,10 @@
                 <a:round/>
               </a:ln>
             </p:spPr>
+            <p:txBody xmlns:a="http://schemas.openxmlformats.org/drawingml/2006/main">
+              <a:bodyPr/>
+              <a:p/>
+            </p:txBody>
           </p:sp>
           <p:sp>
             <p:nvSpPr>
@@ -12383,6 +12687,10 @@
               <a:effectRef xmlns:a="http://schemas.openxmlformats.org/drawingml/2006/main" idx="11"/>
               <a:fontRef xmlns:a="http://schemas.openxmlformats.org/drawingml/2006/main" idx="major"/>
             </p:style>
+            <p:txBody xmlns:a="http://schemas.openxmlformats.org/drawingml/2006/main">
+              <a:bodyPr/>
+              <a:p/>
+            </p:txBody>
           </p:sp>
           <p:sp>
             <p:nvSpPr>
@@ -12430,6 +12738,10 @@
                 <a:round/>
               </a:ln>
             </p:spPr>
+            <p:txBody xmlns:a="http://schemas.openxmlformats.org/drawingml/2006/main">
+              <a:bodyPr/>
+              <a:p/>
+            </p:txBody>
           </p:sp>
           <p:sp>
             <p:nvSpPr>
@@ -12483,6 +12795,10 @@
               <a:effectRef xmlns:a="http://schemas.openxmlformats.org/drawingml/2006/main" idx="11"/>
               <a:fontRef xmlns:a="http://schemas.openxmlformats.org/drawingml/2006/main" idx="major"/>
             </p:style>
+            <p:txBody xmlns:a="http://schemas.openxmlformats.org/drawingml/2006/main">
+              <a:bodyPr/>
+              <a:p/>
+            </p:txBody>
           </p:sp>
           <p:sp>
             <p:nvSpPr>
@@ -12530,6 +12846,10 @@
                 <a:round/>
               </a:ln>
             </p:spPr>
+            <p:txBody xmlns:a="http://schemas.openxmlformats.org/drawingml/2006/main">
+              <a:bodyPr/>
+              <a:p/>
+            </p:txBody>
           </p:sp>
         </p:grpSp>
         <p:grpSp>
@@ -12586,6 +12906,10 @@
                 <a:round/>
               </a:ln>
             </p:spPr>
+            <p:txBody xmlns:a="http://schemas.openxmlformats.org/drawingml/2006/main">
+              <a:bodyPr/>
+              <a:p/>
+            </p:txBody>
           </p:sp>
           <p:sp>
             <p:nvSpPr>
@@ -12736,7 +13060,7 @@
                     <a:solidFill>
                       <a:srgbClr val="24272A"/>
                     </a:solidFill>
-                    <a:latin typeface="Comic Sans MS"/>
+                    <a:latin typeface="Times New Roman"/>
                     <a:ea typeface="Comic Sans MS"/>
                     <a:cs typeface="Comic Sans MS"/>
                   </a:rPr>
@@ -12824,6 +13148,10 @@
                   <a:round/>
                 </a:ln>
               </p:spPr>
+              <p:txBody xmlns:a="http://schemas.openxmlformats.org/drawingml/2006/main">
+                <a:bodyPr/>
+                <a:p/>
+              </p:txBody>
             </p:sp>
             <p:sp>
               <p:nvSpPr>
@@ -12917,6 +13245,10 @@
                   <a:round/>
                 </a:ln>
               </p:spPr>
+              <p:txBody xmlns:a="http://schemas.openxmlformats.org/drawingml/2006/main">
+                <a:bodyPr/>
+                <a:p/>
+              </p:txBody>
             </p:sp>
             <p:sp>
               <p:nvSpPr>
@@ -12958,6 +13290,10 @@
                   <a:round/>
                 </a:ln>
               </p:spPr>
+              <p:txBody xmlns:a="http://schemas.openxmlformats.org/drawingml/2006/main">
+                <a:bodyPr/>
+                <a:p/>
+              </p:txBody>
             </p:sp>
             <p:sp>
               <p:nvSpPr>
@@ -12999,6 +13335,10 @@
                   <a:round/>
                 </a:ln>
               </p:spPr>
+              <p:txBody xmlns:a="http://schemas.openxmlformats.org/drawingml/2006/main">
+                <a:bodyPr/>
+                <a:p/>
+              </p:txBody>
             </p:sp>
             <p:sp>
               <p:nvSpPr>
@@ -13040,6 +13380,10 @@
                   <a:round/>
                 </a:ln>
               </p:spPr>
+              <p:txBody xmlns:a="http://schemas.openxmlformats.org/drawingml/2006/main">
+                <a:bodyPr/>
+                <a:p/>
+              </p:txBody>
             </p:sp>
             <p:sp>
               <p:nvSpPr>
@@ -13081,6 +13425,10 @@
                   <a:round/>
                 </a:ln>
               </p:spPr>
+              <p:txBody xmlns:a="http://schemas.openxmlformats.org/drawingml/2006/main">
+                <a:bodyPr/>
+                <a:p/>
+              </p:txBody>
             </p:sp>
           </p:grpSp>
           <p:sp>
@@ -13232,7 +13580,7 @@
                     <a:solidFill>
                       <a:srgbClr val="24272A"/>
                     </a:solidFill>
-                    <a:latin typeface="Arial"/>
+                    <a:latin typeface="Times New Roman"/>
                     <a:ea typeface="Arial"/>
                     <a:cs typeface="Arial"/>
                   </a:rPr>
@@ -13390,7 +13738,7 @@
                     <a:solidFill>
                       <a:srgbClr val="626A6F"/>
                     </a:solidFill>
-                    <a:latin typeface="Arial"/>
+                    <a:latin typeface="Times New Roman"/>
                     <a:ea typeface="Arial"/>
                     <a:cs typeface="Arial"/>
                   </a:rPr>
@@ -13445,6 +13793,10 @@
               <a:effectRef xmlns:a="http://schemas.openxmlformats.org/drawingml/2006/main" idx="11"/>
               <a:fontRef xmlns:a="http://schemas.openxmlformats.org/drawingml/2006/main" idx="major"/>
             </p:style>
+            <p:txBody xmlns:a="http://schemas.openxmlformats.org/drawingml/2006/main">
+              <a:bodyPr/>
+              <a:p/>
+            </p:txBody>
           </p:sp>
           <p:sp>
             <p:nvSpPr>
@@ -13492,6 +13844,10 @@
                 <a:round/>
               </a:ln>
             </p:spPr>
+            <p:txBody xmlns:a="http://schemas.openxmlformats.org/drawingml/2006/main">
+              <a:bodyPr/>
+              <a:p/>
+            </p:txBody>
           </p:sp>
           <p:grpSp>
             <p:nvGrpSpPr>
@@ -13550,6 +13906,10 @@
                   <a:round/>
                 </a:ln>
               </p:spPr>
+              <p:txBody xmlns:a="http://schemas.openxmlformats.org/drawingml/2006/main">
+                <a:bodyPr/>
+                <a:p/>
+              </p:txBody>
             </p:sp>
             <p:sp>
               <p:nvSpPr>
@@ -13594,6 +13954,10 @@
                   <a:round/>
                 </a:ln>
               </p:spPr>
+              <p:txBody xmlns:a="http://schemas.openxmlformats.org/drawingml/2006/main">
+                <a:bodyPr/>
+                <a:p/>
+              </p:txBody>
             </p:sp>
             <p:sp>
               <p:nvSpPr>
@@ -13635,6 +13999,10 @@
                   <a:round/>
                 </a:ln>
               </p:spPr>
+              <p:txBody xmlns:a="http://schemas.openxmlformats.org/drawingml/2006/main">
+                <a:bodyPr/>
+                <a:p/>
+              </p:txBody>
             </p:sp>
           </p:grpSp>
           <p:sp>
@@ -13786,7 +14154,7 @@
                     <a:solidFill>
                       <a:srgbClr val="24272A"/>
                     </a:solidFill>
-                    <a:latin typeface="Arial"/>
+                    <a:latin typeface="Times New Roman"/>
                     <a:ea typeface="Arial"/>
                     <a:cs typeface="Arial"/>
                   </a:rPr>
@@ -13944,7 +14312,7 @@
                     <a:solidFill>
                       <a:srgbClr val="626A6F"/>
                     </a:solidFill>
-                    <a:latin typeface="Arial"/>
+                    <a:latin typeface="Times New Roman"/>
                     <a:ea typeface="Arial"/>
                     <a:cs typeface="Arial"/>
                   </a:rPr>
@@ -13999,6 +14367,10 @@
               <a:effectRef xmlns:a="http://schemas.openxmlformats.org/drawingml/2006/main" idx="11"/>
               <a:fontRef xmlns:a="http://schemas.openxmlformats.org/drawingml/2006/main" idx="major"/>
             </p:style>
+            <p:txBody xmlns:a="http://schemas.openxmlformats.org/drawingml/2006/main">
+              <a:bodyPr/>
+              <a:p/>
+            </p:txBody>
           </p:sp>
           <p:sp>
             <p:nvSpPr>
@@ -14046,6 +14418,10 @@
                 <a:round/>
               </a:ln>
             </p:spPr>
+            <p:txBody xmlns:a="http://schemas.openxmlformats.org/drawingml/2006/main">
+              <a:bodyPr/>
+              <a:p/>
+            </p:txBody>
           </p:sp>
           <p:grpSp>
             <p:nvGrpSpPr>
@@ -14143,6 +14519,10 @@
                   <a:round/>
                 </a:ln>
               </p:spPr>
+              <p:txBody xmlns:a="http://schemas.openxmlformats.org/drawingml/2006/main">
+                <a:bodyPr/>
+                <a:p/>
+              </p:txBody>
             </p:sp>
             <p:sp>
               <p:nvSpPr>
@@ -14184,6 +14564,10 @@
                   <a:round/>
                 </a:ln>
               </p:spPr>
+              <p:txBody xmlns:a="http://schemas.openxmlformats.org/drawingml/2006/main">
+                <a:bodyPr/>
+                <a:p/>
+              </p:txBody>
             </p:sp>
             <p:sp>
               <p:nvSpPr>
@@ -14225,6 +14609,10 @@
                   <a:round/>
                 </a:ln>
               </p:spPr>
+              <p:txBody xmlns:a="http://schemas.openxmlformats.org/drawingml/2006/main">
+                <a:bodyPr/>
+                <a:p/>
+              </p:txBody>
             </p:sp>
           </p:grpSp>
           <p:sp>
@@ -14376,7 +14764,7 @@
                     <a:solidFill>
                       <a:srgbClr val="24272A"/>
                     </a:solidFill>
-                    <a:latin typeface="Arial"/>
+                    <a:latin typeface="Times New Roman"/>
                     <a:ea typeface="Arial"/>
                     <a:cs typeface="Arial"/>
                   </a:rPr>
@@ -14534,7 +14922,7 @@
                     <a:solidFill>
                       <a:srgbClr val="626A6F"/>
                     </a:solidFill>
-                    <a:latin typeface="Arial"/>
+                    <a:latin typeface="Times New Roman"/>
                     <a:ea typeface="Arial"/>
                     <a:cs typeface="Arial"/>
                   </a:rPr>
@@ -14589,6 +14977,10 @@
               <a:effectRef xmlns:a="http://schemas.openxmlformats.org/drawingml/2006/main" idx="11"/>
               <a:fontRef xmlns:a="http://schemas.openxmlformats.org/drawingml/2006/main" idx="major"/>
             </p:style>
+            <p:txBody xmlns:a="http://schemas.openxmlformats.org/drawingml/2006/main">
+              <a:bodyPr/>
+              <a:p/>
+            </p:txBody>
           </p:sp>
           <p:sp>
             <p:nvSpPr>
@@ -14636,6 +15028,10 @@
                 <a:round/>
               </a:ln>
             </p:spPr>
+            <p:txBody xmlns:a="http://schemas.openxmlformats.org/drawingml/2006/main">
+              <a:bodyPr/>
+              <a:p/>
+            </p:txBody>
           </p:sp>
           <p:grpSp>
             <p:nvGrpSpPr>
@@ -14691,6 +15087,10 @@
                   <a:round/>
                 </a:ln>
               </p:spPr>
+              <p:txBody xmlns:a="http://schemas.openxmlformats.org/drawingml/2006/main">
+                <a:bodyPr/>
+                <a:p/>
+              </p:txBody>
             </p:sp>
             <p:sp>
               <p:nvSpPr>
@@ -14735,6 +15135,10 @@
                   <a:round/>
                 </a:ln>
               </p:spPr>
+              <p:txBody xmlns:a="http://schemas.openxmlformats.org/drawingml/2006/main">
+                <a:bodyPr/>
+                <a:p/>
+              </p:txBody>
             </p:sp>
             <p:sp>
               <p:nvSpPr>
@@ -14826,6 +15230,10 @@
                   <a:round/>
                 </a:ln>
               </p:spPr>
+              <p:txBody xmlns:a="http://schemas.openxmlformats.org/drawingml/2006/main">
+                <a:bodyPr/>
+                <a:p/>
+              </p:txBody>
             </p:sp>
             <p:sp>
               <p:nvSpPr>
@@ -14870,6 +15278,10 @@
                   <a:round/>
                 </a:ln>
               </p:spPr>
+              <p:txBody xmlns:a="http://schemas.openxmlformats.org/drawingml/2006/main">
+                <a:bodyPr/>
+                <a:p/>
+              </p:txBody>
             </p:sp>
             <p:sp>
               <p:nvSpPr>
@@ -14911,6 +15323,10 @@
                   <a:round/>
                 </a:ln>
               </p:spPr>
+              <p:txBody xmlns:a="http://schemas.openxmlformats.org/drawingml/2006/main">
+                <a:bodyPr/>
+                <a:p/>
+              </p:txBody>
             </p:sp>
           </p:grpSp>
           <p:sp>
@@ -15062,7 +15478,7 @@
                     <a:solidFill>
                       <a:srgbClr val="24272A"/>
                     </a:solidFill>
-                    <a:latin typeface="Arial"/>
+                    <a:latin typeface="Times New Roman"/>
                     <a:ea typeface="Arial"/>
                     <a:cs typeface="Arial"/>
                   </a:rPr>
@@ -15220,7 +15636,7 @@
                     <a:solidFill>
                       <a:srgbClr val="626A6F"/>
                     </a:solidFill>
-                    <a:latin typeface="Arial"/>
+                    <a:latin typeface="Times New Roman"/>
                     <a:ea typeface="Arial"/>
                     <a:cs typeface="Arial"/>
                   </a:rPr>
@@ -15284,6 +15700,10 @@
               <a:effectRef xmlns:a="http://schemas.openxmlformats.org/drawingml/2006/main" idx="11"/>
               <a:fontRef xmlns:a="http://schemas.openxmlformats.org/drawingml/2006/main" idx="major"/>
             </p:style>
+            <p:txBody xmlns:a="http://schemas.openxmlformats.org/drawingml/2006/main">
+              <a:bodyPr/>
+              <a:p/>
+            </p:txBody>
           </p:sp>
           <p:sp>
             <p:nvSpPr>
@@ -15331,6 +15751,10 @@
                 <a:round/>
               </a:ln>
             </p:spPr>
+            <p:txBody xmlns:a="http://schemas.openxmlformats.org/drawingml/2006/main">
+              <a:bodyPr/>
+              <a:p/>
+            </p:txBody>
           </p:sp>
           <p:sp>
             <p:nvSpPr>
@@ -15363,6 +15787,10 @@
                 <a:round/>
               </a:ln>
             </p:spPr>
+            <p:txBody xmlns:a="http://schemas.openxmlformats.org/drawingml/2006/main">
+              <a:bodyPr/>
+              <a:p/>
+            </p:txBody>
           </p:sp>
           <p:sp>
             <p:nvSpPr>
@@ -15513,7 +15941,7 @@
                     <a:solidFill>
                       <a:srgbClr val="328372"/>
                     </a:solidFill>
-                    <a:latin typeface="Arial"/>
+                    <a:latin typeface="Times New Roman"/>
                     <a:ea typeface="Arial"/>
                     <a:cs typeface="Arial"/>
                   </a:rPr>

--- a/artifacts/semantic_revision_20261022/pptx/Figure14_Semantic.pptx
+++ b/artifacts/semantic_revision_20261022/pptx/Figure14_Semantic.pptx
@@ -3586,10 +3586,6 @@
                   <a:round/>
                 </a:ln>
               </p:spPr>
-              <p:txBody xmlns:a="http://schemas.openxmlformats.org/drawingml/2006/main">
-                <a:bodyPr/>
-                <a:p/>
-              </p:txBody>
             </p:sp>
             <p:sp>
               <p:nvSpPr>
@@ -3667,10 +3663,6 @@
                   <a:round/>
                 </a:ln>
               </p:spPr>
-              <p:txBody xmlns:a="http://schemas.openxmlformats.org/drawingml/2006/main">
-                <a:bodyPr/>
-                <a:p/>
-              </p:txBody>
             </p:sp>
             <p:sp>
               <p:nvSpPr>
@@ -3739,10 +3731,6 @@
                   <a:round/>
                 </a:ln>
               </p:spPr>
-              <p:txBody xmlns:a="http://schemas.openxmlformats.org/drawingml/2006/main">
-                <a:bodyPr/>
-                <a:p/>
-              </p:txBody>
             </p:sp>
           </p:grpSp>
           <p:sp>
@@ -3894,7 +3882,7 @@
                     <a:solidFill>
                       <a:srgbClr val="24272A"/>
                     </a:solidFill>
-                    <a:latin typeface="Times New Roman"/>
+                    <a:latin typeface="Comic Sans MS"/>
                     <a:ea typeface="Comic Sans MS"/>
                     <a:cs typeface="Comic Sans MS"/>
                   </a:rPr>
@@ -4052,7 +4040,7 @@
                     <a:solidFill>
                       <a:srgbClr val="626A6F"/>
                     </a:solidFill>
-                    <a:latin typeface="Times New Roman"/>
+                    <a:latin typeface="Arial"/>
                     <a:ea typeface="Arial"/>
                     <a:cs typeface="Arial"/>
                   </a:rPr>
@@ -4098,10 +4086,6 @@
               <a:effectRef xmlns:a="http://schemas.openxmlformats.org/drawingml/2006/main" idx="10"/>
               <a:fontRef xmlns:a="http://schemas.openxmlformats.org/drawingml/2006/main" idx="major"/>
             </p:style>
-            <p:txBody xmlns:a="http://schemas.openxmlformats.org/drawingml/2006/main">
-              <a:bodyPr/>
-              <a:p/>
-            </p:txBody>
           </p:sp>
           <p:sp>
             <p:nvSpPr>
@@ -4252,7 +4236,7 @@
                     <a:solidFill>
                       <a:srgbClr val="24272A"/>
                     </a:solidFill>
-                    <a:latin typeface="Times New Roman"/>
+                    <a:latin typeface="Arial"/>
                     <a:ea typeface="Arial"/>
                     <a:cs typeface="Arial"/>
                   </a:rPr>
@@ -4307,10 +4291,6 @@
               <a:effectRef xmlns:a="http://schemas.openxmlformats.org/drawingml/2006/main" idx="11"/>
               <a:fontRef xmlns:a="http://schemas.openxmlformats.org/drawingml/2006/main" idx="major"/>
             </p:style>
-            <p:txBody xmlns:a="http://schemas.openxmlformats.org/drawingml/2006/main">
-              <a:bodyPr/>
-              <a:p/>
-            </p:txBody>
           </p:sp>
           <p:sp>
             <p:nvSpPr>
@@ -4358,10 +4338,6 @@
                 <a:round/>
               </a:ln>
             </p:spPr>
-            <p:txBody xmlns:a="http://schemas.openxmlformats.org/drawingml/2006/main">
-              <a:bodyPr/>
-              <a:p/>
-            </p:txBody>
           </p:sp>
           <p:sp>
             <p:nvSpPr>
@@ -4512,7 +4488,7 @@
                     <a:solidFill>
                       <a:srgbClr val="24272A"/>
                     </a:solidFill>
-                    <a:latin typeface="Times New Roman"/>
+                    <a:latin typeface="Arial"/>
                     <a:ea typeface="Arial"/>
                     <a:cs typeface="Arial"/>
                   </a:rPr>
@@ -4685,7 +4661,7 @@
                     <a:solidFill>
                       <a:srgbClr val="24272A"/>
                     </a:solidFill>
-                    <a:latin typeface="Times New Roman"/>
+                    <a:latin typeface="Comic Sans MS"/>
                     <a:ea typeface="Comic Sans MS"/>
                     <a:cs typeface="Comic Sans MS"/>
                   </a:rPr>
@@ -4773,10 +4749,6 @@
                   <a:round/>
                 </a:ln>
               </p:spPr>
-              <p:txBody xmlns:a="http://schemas.openxmlformats.org/drawingml/2006/main">
-                <a:bodyPr/>
-                <a:p/>
-              </p:txBody>
             </p:sp>
             <p:sp>
               <p:nvSpPr>
@@ -4843,10 +4815,6 @@
                   <a:round/>
                 </a:ln>
               </p:spPr>
-              <p:txBody xmlns:a="http://schemas.openxmlformats.org/drawingml/2006/main">
-                <a:bodyPr/>
-                <a:p/>
-              </p:txBody>
             </p:sp>
             <p:sp>
               <p:nvSpPr>
@@ -4888,10 +4856,6 @@
                   <a:round/>
                 </a:ln>
               </p:spPr>
-              <p:txBody xmlns:a="http://schemas.openxmlformats.org/drawingml/2006/main">
-                <a:bodyPr/>
-                <a:p/>
-              </p:txBody>
             </p:sp>
             <p:sp>
               <p:nvSpPr>
@@ -4933,10 +4897,6 @@
                   <a:round/>
                 </a:ln>
               </p:spPr>
-              <p:txBody xmlns:a="http://schemas.openxmlformats.org/drawingml/2006/main">
-                <a:bodyPr/>
-                <a:p/>
-              </p:txBody>
             </p:sp>
             <p:sp>
               <p:nvSpPr>
@@ -4981,10 +4941,6 @@
                   <a:round/>
                 </a:ln>
               </p:spPr>
-              <p:txBody xmlns:a="http://schemas.openxmlformats.org/drawingml/2006/main">
-                <a:bodyPr/>
-                <a:p/>
-              </p:txBody>
             </p:sp>
             <p:sp>
               <p:nvSpPr>
@@ -5029,10 +4985,6 @@
                   <a:round/>
                 </a:ln>
               </p:spPr>
-              <p:txBody xmlns:a="http://schemas.openxmlformats.org/drawingml/2006/main">
-                <a:bodyPr/>
-                <a:p/>
-              </p:txBody>
             </p:sp>
           </p:grpSp>
           <p:sp>
@@ -5184,7 +5136,7 @@
                     <a:solidFill>
                       <a:srgbClr val="24272A"/>
                     </a:solidFill>
-                    <a:latin typeface="Times New Roman"/>
+                    <a:latin typeface="Arial"/>
                     <a:ea typeface="Arial"/>
                     <a:cs typeface="Arial"/>
                   </a:rPr>
@@ -5226,10 +5178,6 @@
                 <a:round/>
               </a:ln>
             </p:spPr>
-            <p:txBody xmlns:a="http://schemas.openxmlformats.org/drawingml/2006/main">
-              <a:bodyPr/>
-              <a:p/>
-            </p:txBody>
           </p:sp>
           <p:sp>
             <p:nvSpPr>
@@ -5264,10 +5212,6 @@
                 <a:round/>
               </a:ln>
             </p:spPr>
-            <p:txBody xmlns:a="http://schemas.openxmlformats.org/drawingml/2006/main">
-              <a:bodyPr/>
-              <a:p/>
-            </p:txBody>
           </p:sp>
           <p:sp>
             <p:nvSpPr>
@@ -5302,10 +5246,6 @@
                 <a:round/>
               </a:ln>
             </p:spPr>
-            <p:txBody xmlns:a="http://schemas.openxmlformats.org/drawingml/2006/main">
-              <a:bodyPr/>
-              <a:p/>
-            </p:txBody>
           </p:sp>
           <p:sp>
             <p:nvSpPr>
@@ -5340,10 +5280,6 @@
                 <a:round/>
               </a:ln>
             </p:spPr>
-            <p:txBody xmlns:a="http://schemas.openxmlformats.org/drawingml/2006/main">
-              <a:bodyPr/>
-              <a:p/>
-            </p:txBody>
           </p:sp>
           <p:sp>
             <p:nvSpPr>
@@ -5378,10 +5314,6 @@
                 <a:round/>
               </a:ln>
             </p:spPr>
-            <p:txBody xmlns:a="http://schemas.openxmlformats.org/drawingml/2006/main">
-              <a:bodyPr/>
-              <a:p/>
-            </p:txBody>
           </p:sp>
           <p:sp>
             <p:nvSpPr>
@@ -5416,10 +5348,6 @@
                 <a:round/>
               </a:ln>
             </p:spPr>
-            <p:txBody xmlns:a="http://schemas.openxmlformats.org/drawingml/2006/main">
-              <a:bodyPr/>
-              <a:p/>
-            </p:txBody>
           </p:sp>
           <p:sp>
             <p:nvSpPr>
@@ -5454,10 +5382,6 @@
                 <a:round/>
               </a:ln>
             </p:spPr>
-            <p:txBody xmlns:a="http://schemas.openxmlformats.org/drawingml/2006/main">
-              <a:bodyPr/>
-              <a:p/>
-            </p:txBody>
           </p:sp>
           <p:sp>
             <p:nvSpPr>
@@ -5492,10 +5416,6 @@
                 <a:round/>
               </a:ln>
             </p:spPr>
-            <p:txBody xmlns:a="http://schemas.openxmlformats.org/drawingml/2006/main">
-              <a:bodyPr/>
-              <a:p/>
-            </p:txBody>
           </p:sp>
           <p:sp>
             <p:nvSpPr>
@@ -5530,10 +5450,6 @@
                 <a:round/>
               </a:ln>
             </p:spPr>
-            <p:txBody xmlns:a="http://schemas.openxmlformats.org/drawingml/2006/main">
-              <a:bodyPr/>
-              <a:p/>
-            </p:txBody>
           </p:sp>
           <p:sp>
             <p:nvSpPr>
@@ -5684,7 +5600,7 @@
                     <a:solidFill>
                       <a:srgbClr val="24272A"/>
                     </a:solidFill>
-                    <a:latin typeface="Times New Roman"/>
+                    <a:latin typeface="Arial"/>
                     <a:ea typeface="Arial"/>
                     <a:cs typeface="Arial"/>
                   </a:rPr>
@@ -5842,7 +5758,7 @@
                     <a:solidFill>
                       <a:srgbClr val="24272A"/>
                     </a:solidFill>
-                    <a:latin typeface="Times New Roman"/>
+                    <a:latin typeface="Arial"/>
                     <a:ea typeface="Arial"/>
                     <a:cs typeface="Arial"/>
                   </a:rPr>
@@ -6000,7 +5916,7 @@
                     <a:solidFill>
                       <a:srgbClr val="24272A"/>
                     </a:solidFill>
-                    <a:latin typeface="Times New Roman"/>
+                    <a:latin typeface="Arial"/>
                     <a:ea typeface="Arial"/>
                     <a:cs typeface="Arial"/>
                   </a:rPr>
@@ -6158,7 +6074,7 @@
                     <a:solidFill>
                       <a:srgbClr val="24272A"/>
                     </a:solidFill>
-                    <a:latin typeface="Times New Roman"/>
+                    <a:latin typeface="Arial"/>
                     <a:ea typeface="Arial"/>
                     <a:cs typeface="Arial"/>
                   </a:rPr>
@@ -6316,7 +6232,7 @@
                     <a:solidFill>
                       <a:srgbClr val="24272A"/>
                     </a:solidFill>
-                    <a:latin typeface="Times New Roman"/>
+                    <a:latin typeface="Arial"/>
                     <a:ea typeface="Arial"/>
                     <a:cs typeface="Arial"/>
                   </a:rPr>
@@ -6474,7 +6390,7 @@
                     <a:solidFill>
                       <a:srgbClr val="24272A"/>
                     </a:solidFill>
-                    <a:latin typeface="Times New Roman"/>
+                    <a:latin typeface="Arial"/>
                     <a:ea typeface="Arial"/>
                     <a:cs typeface="Arial"/>
                   </a:rPr>
@@ -6632,7 +6548,7 @@
                     <a:solidFill>
                       <a:srgbClr val="24272A"/>
                     </a:solidFill>
-                    <a:latin typeface="Times New Roman"/>
+                    <a:latin typeface="Arial"/>
                     <a:ea typeface="Arial"/>
                     <a:cs typeface="Arial"/>
                   </a:rPr>
@@ -6790,7 +6706,7 @@
                     <a:solidFill>
                       <a:srgbClr val="24272A"/>
                     </a:solidFill>
-                    <a:latin typeface="Times New Roman"/>
+                    <a:latin typeface="Arial"/>
                     <a:ea typeface="Arial"/>
                     <a:cs typeface="Arial"/>
                   </a:rPr>
@@ -6948,7 +6864,7 @@
                     <a:solidFill>
                       <a:srgbClr val="24272A"/>
                     </a:solidFill>
-                    <a:latin typeface="Times New Roman"/>
+                    <a:latin typeface="Arial"/>
                     <a:ea typeface="Arial"/>
                     <a:cs typeface="Arial"/>
                   </a:rPr>
@@ -7106,7 +7022,7 @@
                     <a:solidFill>
                       <a:srgbClr val="626A6F"/>
                     </a:solidFill>
-                    <a:latin typeface="Times New Roman"/>
+                    <a:latin typeface="Arial"/>
                     <a:ea typeface="Arial"/>
                     <a:cs typeface="Arial"/>
                   </a:rPr>
@@ -7279,7 +7195,7 @@
                     <a:solidFill>
                       <a:srgbClr val="24272A"/>
                     </a:solidFill>
-                    <a:latin typeface="Times New Roman"/>
+                    <a:latin typeface="Comic Sans MS"/>
                     <a:ea typeface="Comic Sans MS"/>
                     <a:cs typeface="Comic Sans MS"/>
                   </a:rPr>
@@ -7367,10 +7283,6 @@
                   <a:round/>
                 </a:ln>
               </p:spPr>
-              <p:txBody xmlns:a="http://schemas.openxmlformats.org/drawingml/2006/main">
-                <a:bodyPr/>
-                <a:p/>
-              </p:txBody>
             </p:sp>
             <p:sp>
               <p:nvSpPr>
@@ -7422,10 +7334,6 @@
                   <a:round/>
                 </a:ln>
               </p:spPr>
-              <p:txBody xmlns:a="http://schemas.openxmlformats.org/drawingml/2006/main">
-                <a:bodyPr/>
-                <a:p/>
-              </p:txBody>
             </p:sp>
             <p:sp>
               <p:nvSpPr>
@@ -7467,10 +7375,6 @@
                   <a:round/>
                 </a:ln>
               </p:spPr>
-              <p:txBody xmlns:a="http://schemas.openxmlformats.org/drawingml/2006/main">
-                <a:bodyPr/>
-                <a:p/>
-              </p:txBody>
             </p:sp>
           </p:grpSp>
           <p:sp>
@@ -7622,7 +7526,7 @@
                     <a:solidFill>
                       <a:srgbClr val="24272A"/>
                     </a:solidFill>
-                    <a:latin typeface="Times New Roman"/>
+                    <a:latin typeface="Arial"/>
                     <a:ea typeface="Arial"/>
                     <a:cs typeface="Arial"/>
                   </a:rPr>
@@ -7698,10 +7602,6 @@
                   <a:round/>
                 </a:ln>
               </p:spPr>
-              <p:txBody xmlns:a="http://schemas.openxmlformats.org/drawingml/2006/main">
-                <a:bodyPr/>
-                <a:p/>
-              </p:txBody>
             </p:sp>
             <p:sp>
               <p:nvSpPr>
@@ -7756,10 +7656,6 @@
                   <a:round/>
                 </a:ln>
               </p:spPr>
-              <p:txBody xmlns:a="http://schemas.openxmlformats.org/drawingml/2006/main">
-                <a:bodyPr/>
-                <a:p/>
-              </p:txBody>
             </p:sp>
           </p:grpSp>
           <p:sp>
@@ -7911,7 +7807,7 @@
                     <a:solidFill>
                       <a:srgbClr val="24272A"/>
                     </a:solidFill>
-                    <a:latin typeface="Times New Roman"/>
+                    <a:latin typeface="Arial"/>
                     <a:ea typeface="Arial"/>
                     <a:cs typeface="Arial"/>
                   </a:rPr>
@@ -7974,10 +7870,6 @@
                   <a:round/>
                 </a:ln>
               </p:spPr>
-              <p:txBody xmlns:a="http://schemas.openxmlformats.org/drawingml/2006/main">
-                <a:bodyPr/>
-                <a:p/>
-              </p:txBody>
             </p:sp>
             <p:sp>
               <p:nvSpPr>
@@ -8019,10 +7911,6 @@
                   <a:round/>
                 </a:ln>
               </p:spPr>
-              <p:txBody xmlns:a="http://schemas.openxmlformats.org/drawingml/2006/main">
-                <a:bodyPr/>
-                <a:p/>
-              </p:txBody>
             </p:sp>
             <p:sp>
               <p:nvSpPr>
@@ -8064,10 +7952,6 @@
                   <a:round/>
                 </a:ln>
               </p:spPr>
-              <p:txBody xmlns:a="http://schemas.openxmlformats.org/drawingml/2006/main">
-                <a:bodyPr/>
-                <a:p/>
-              </p:txBody>
             </p:sp>
             <p:sp>
               <p:nvSpPr>
@@ -8109,10 +7993,6 @@
                   <a:round/>
                 </a:ln>
               </p:spPr>
-              <p:txBody xmlns:a="http://schemas.openxmlformats.org/drawingml/2006/main">
-                <a:bodyPr/>
-                <a:p/>
-              </p:txBody>
             </p:sp>
             <p:sp>
               <p:nvSpPr>
@@ -8154,10 +8034,6 @@
                   <a:round/>
                 </a:ln>
               </p:spPr>
-              <p:txBody xmlns:a="http://schemas.openxmlformats.org/drawingml/2006/main">
-                <a:bodyPr/>
-                <a:p/>
-              </p:txBody>
             </p:sp>
             <p:sp>
               <p:nvSpPr>
@@ -8199,10 +8075,6 @@
                   <a:round/>
                 </a:ln>
               </p:spPr>
-              <p:txBody xmlns:a="http://schemas.openxmlformats.org/drawingml/2006/main">
-                <a:bodyPr/>
-                <a:p/>
-              </p:txBody>
             </p:sp>
             <p:sp>
               <p:nvSpPr>
@@ -8244,10 +8116,6 @@
                   <a:round/>
                 </a:ln>
               </p:spPr>
-              <p:txBody xmlns:a="http://schemas.openxmlformats.org/drawingml/2006/main">
-                <a:bodyPr/>
-                <a:p/>
-              </p:txBody>
             </p:sp>
             <p:sp>
               <p:nvSpPr>
@@ -8289,10 +8157,6 @@
                   <a:round/>
                 </a:ln>
               </p:spPr>
-              <p:txBody xmlns:a="http://schemas.openxmlformats.org/drawingml/2006/main">
-                <a:bodyPr/>
-                <a:p/>
-              </p:txBody>
             </p:sp>
             <p:sp>
               <p:nvSpPr>
@@ -8334,10 +8198,6 @@
                   <a:round/>
                 </a:ln>
               </p:spPr>
-              <p:txBody xmlns:a="http://schemas.openxmlformats.org/drawingml/2006/main">
-                <a:bodyPr/>
-                <a:p/>
-              </p:txBody>
             </p:sp>
           </p:grpSp>
           <p:sp>
@@ -8489,7 +8349,7 @@
                     <a:solidFill>
                       <a:srgbClr val="24272A"/>
                     </a:solidFill>
-                    <a:latin typeface="Times New Roman"/>
+                    <a:latin typeface="Arial"/>
                     <a:ea typeface="Arial"/>
                     <a:cs typeface="Arial"/>
                   </a:rPr>
@@ -8565,10 +8425,6 @@
                   <a:round/>
                 </a:ln>
               </p:spPr>
-              <p:txBody xmlns:a="http://schemas.openxmlformats.org/drawingml/2006/main">
-                <a:bodyPr/>
-                <a:p/>
-              </p:txBody>
             </p:sp>
             <p:sp>
               <p:nvSpPr>
@@ -8622,10 +8478,6 @@
                   <a:round/>
                 </a:ln>
               </p:spPr>
-              <p:txBody xmlns:a="http://schemas.openxmlformats.org/drawingml/2006/main">
-                <a:bodyPr/>
-                <a:p/>
-              </p:txBody>
             </p:sp>
           </p:grpSp>
           <p:sp>
@@ -8777,7 +8629,7 @@
                     <a:solidFill>
                       <a:srgbClr val="24272A"/>
                     </a:solidFill>
-                    <a:latin typeface="Times New Roman"/>
+                    <a:latin typeface="Arial"/>
                     <a:ea typeface="Arial"/>
                     <a:cs typeface="Arial"/>
                   </a:rPr>
@@ -8935,7 +8787,7 @@
                     <a:solidFill>
                       <a:srgbClr val="3F6C85"/>
                     </a:solidFill>
-                    <a:latin typeface="Times New Roman"/>
+                    <a:latin typeface="Arial"/>
                     <a:ea typeface="Arial"/>
                     <a:cs typeface="Arial"/>
                   </a:rPr>
@@ -8996,10 +8848,6 @@
               <a:effectRef xmlns:a="http://schemas.openxmlformats.org/drawingml/2006/main" idx="10"/>
               <a:fontRef xmlns:a="http://schemas.openxmlformats.org/drawingml/2006/main" idx="major"/>
             </p:style>
-            <p:txBody xmlns:a="http://schemas.openxmlformats.org/drawingml/2006/main">
-              <a:bodyPr/>
-              <a:p/>
-            </p:txBody>
           </p:sp>
           <p:sp>
             <p:nvSpPr>
@@ -9150,7 +8998,7 @@
                     <a:solidFill>
                       <a:srgbClr val="24272A"/>
                     </a:solidFill>
-                    <a:latin typeface="Times New Roman"/>
+                    <a:latin typeface="Comic Sans MS"/>
                     <a:ea typeface="Comic Sans MS"/>
                     <a:cs typeface="Comic Sans MS"/>
                   </a:rPr>
@@ -9225,10 +9073,6 @@
                   <a:round/>
                 </a:ln>
               </p:spPr>
-              <p:txBody xmlns:a="http://schemas.openxmlformats.org/drawingml/2006/main">
-                <a:bodyPr/>
-                <a:p/>
-              </p:txBody>
             </p:sp>
             <p:sp>
               <p:nvSpPr>
@@ -9272,10 +9116,6 @@
                   <a:round/>
                 </a:ln>
               </p:spPr>
-              <p:txBody xmlns:a="http://schemas.openxmlformats.org/drawingml/2006/main">
-                <a:bodyPr/>
-                <a:p/>
-              </p:txBody>
             </p:sp>
             <p:sp>
               <p:nvSpPr>
@@ -9319,10 +9159,6 @@
                   <a:round/>
                 </a:ln>
               </p:spPr>
-              <p:txBody xmlns:a="http://schemas.openxmlformats.org/drawingml/2006/main">
-                <a:bodyPr/>
-                <a:p/>
-              </p:txBody>
             </p:sp>
             <p:sp>
               <p:nvSpPr>
@@ -9376,10 +9212,6 @@
                   <a:round/>
                 </a:ln>
               </p:spPr>
-              <p:txBody xmlns:a="http://schemas.openxmlformats.org/drawingml/2006/main">
-                <a:bodyPr/>
-                <a:p/>
-              </p:txBody>
             </p:sp>
             <p:sp>
               <p:nvSpPr>
@@ -9421,10 +9253,6 @@
                   <a:round/>
                 </a:ln>
               </p:spPr>
-              <p:txBody xmlns:a="http://schemas.openxmlformats.org/drawingml/2006/main">
-                <a:bodyPr/>
-                <a:p/>
-              </p:txBody>
             </p:sp>
             <p:sp>
               <p:nvSpPr>
@@ -9468,10 +9296,6 @@
                   <a:round/>
                 </a:ln>
               </p:spPr>
-              <p:txBody xmlns:a="http://schemas.openxmlformats.org/drawingml/2006/main">
-                <a:bodyPr/>
-                <a:p/>
-              </p:txBody>
             </p:sp>
             <p:sp>
               <p:nvSpPr>
@@ -9520,10 +9344,6 @@
                   <a:round/>
                 </a:ln>
               </p:spPr>
-              <p:txBody xmlns:a="http://schemas.openxmlformats.org/drawingml/2006/main">
-                <a:bodyPr/>
-                <a:p/>
-              </p:txBody>
             </p:sp>
             <p:sp>
               <p:nvSpPr>
@@ -9567,10 +9387,6 @@
                   <a:round/>
                 </a:ln>
               </p:spPr>
-              <p:txBody xmlns:a="http://schemas.openxmlformats.org/drawingml/2006/main">
-                <a:bodyPr/>
-                <a:p/>
-              </p:txBody>
             </p:sp>
             <p:sp>
               <p:nvSpPr>
@@ -9627,10 +9443,6 @@
                   <a:round/>
                 </a:ln>
               </p:spPr>
-              <p:txBody xmlns:a="http://schemas.openxmlformats.org/drawingml/2006/main">
-                <a:bodyPr/>
-                <a:p/>
-              </p:txBody>
             </p:sp>
           </p:grpSp>
           <p:sp>
@@ -9782,7 +9594,7 @@
                     <a:solidFill>
                       <a:srgbClr val="24272A"/>
                     </a:solidFill>
-                    <a:latin typeface="Times New Roman"/>
+                    <a:latin typeface="Arial"/>
                     <a:ea typeface="Arial"/>
                     <a:cs typeface="Arial"/>
                   </a:rPr>
@@ -9940,7 +9752,7 @@
                     <a:solidFill>
                       <a:srgbClr val="626A6F"/>
                     </a:solidFill>
-                    <a:latin typeface="Times New Roman"/>
+                    <a:latin typeface="Arial"/>
                     <a:ea typeface="Arial"/>
                     <a:cs typeface="Arial"/>
                   </a:rPr>
@@ -10003,10 +9815,6 @@
                   <a:round/>
                 </a:ln>
               </p:spPr>
-              <p:txBody xmlns:a="http://schemas.openxmlformats.org/drawingml/2006/main">
-                <a:bodyPr/>
-                <a:p/>
-              </p:txBody>
             </p:sp>
             <p:sp>
               <p:nvSpPr>
@@ -10048,10 +9856,6 @@
                   <a:round/>
                 </a:ln>
               </p:spPr>
-              <p:txBody xmlns:a="http://schemas.openxmlformats.org/drawingml/2006/main">
-                <a:bodyPr/>
-                <a:p/>
-              </p:txBody>
             </p:sp>
             <p:sp>
               <p:nvSpPr>
@@ -10093,10 +9897,6 @@
                   <a:round/>
                 </a:ln>
               </p:spPr>
-              <p:txBody xmlns:a="http://schemas.openxmlformats.org/drawingml/2006/main">
-                <a:bodyPr/>
-                <a:p/>
-              </p:txBody>
             </p:sp>
             <p:sp>
               <p:nvSpPr>
@@ -10165,10 +9965,6 @@
                   <a:round/>
                 </a:ln>
               </p:spPr>
-              <p:txBody xmlns:a="http://schemas.openxmlformats.org/drawingml/2006/main">
-                <a:bodyPr/>
-                <a:p/>
-              </p:txBody>
             </p:sp>
             <p:sp>
               <p:nvSpPr>
@@ -10210,10 +10006,6 @@
                   <a:round/>
                 </a:ln>
               </p:spPr>
-              <p:txBody xmlns:a="http://schemas.openxmlformats.org/drawingml/2006/main">
-                <a:bodyPr/>
-                <a:p/>
-              </p:txBody>
             </p:sp>
           </p:grpSp>
           <p:sp>
@@ -10365,7 +10157,7 @@
                     <a:solidFill>
                       <a:srgbClr val="24272A"/>
                     </a:solidFill>
-                    <a:latin typeface="Times New Roman"/>
+                    <a:latin typeface="Arial"/>
                     <a:ea typeface="Arial"/>
                     <a:cs typeface="Arial"/>
                   </a:rPr>
@@ -10523,7 +10315,7 @@
                     <a:solidFill>
                       <a:srgbClr val="626A6F"/>
                     </a:solidFill>
-                    <a:latin typeface="Times New Roman"/>
+                    <a:latin typeface="Arial"/>
                     <a:ea typeface="Arial"/>
                     <a:cs typeface="Arial"/>
                   </a:rPr>
@@ -10578,10 +10370,6 @@
                 <a:round/>
               </a:ln>
             </p:spPr>
-            <p:txBody xmlns:a="http://schemas.openxmlformats.org/drawingml/2006/main">
-              <a:bodyPr/>
-              <a:p/>
-            </p:txBody>
           </p:sp>
           <p:sp>
             <p:nvSpPr>
@@ -10623,10 +10411,6 @@
                 <a:round/>
               </a:ln>
             </p:spPr>
-            <p:txBody xmlns:a="http://schemas.openxmlformats.org/drawingml/2006/main">
-              <a:bodyPr/>
-              <a:p/>
-            </p:txBody>
           </p:sp>
           <p:sp>
             <p:nvSpPr>
@@ -10674,10 +10458,6 @@
               <a:effectRef xmlns:a="http://schemas.openxmlformats.org/drawingml/2006/main" idx="11"/>
               <a:fontRef xmlns:a="http://schemas.openxmlformats.org/drawingml/2006/main" idx="major"/>
             </p:style>
-            <p:txBody xmlns:a="http://schemas.openxmlformats.org/drawingml/2006/main">
-              <a:bodyPr/>
-              <a:p/>
-            </p:txBody>
           </p:sp>
           <p:sp>
             <p:nvSpPr>
@@ -10725,10 +10505,6 @@
                 <a:round/>
               </a:ln>
             </p:spPr>
-            <p:txBody xmlns:a="http://schemas.openxmlformats.org/drawingml/2006/main">
-              <a:bodyPr/>
-              <a:p/>
-            </p:txBody>
           </p:sp>
           <p:sp>
             <p:nvSpPr>
@@ -10879,7 +10655,7 @@
                     <a:solidFill>
                       <a:srgbClr val="328372"/>
                     </a:solidFill>
-                    <a:latin typeface="Times New Roman"/>
+                    <a:latin typeface="Arial"/>
                     <a:ea typeface="Arial"/>
                     <a:cs typeface="Arial"/>
                   </a:rPr>
@@ -10928,10 +10704,6 @@
                 <a:round/>
               </a:ln>
             </p:spPr>
-            <p:txBody xmlns:a="http://schemas.openxmlformats.org/drawingml/2006/main">
-              <a:bodyPr/>
-              <a:p/>
-            </p:txBody>
           </p:sp>
           <p:grpSp>
             <p:nvGrpSpPr>
@@ -10990,10 +10762,6 @@
                   <a:round/>
                 </a:ln>
               </p:spPr>
-              <p:txBody xmlns:a="http://schemas.openxmlformats.org/drawingml/2006/main">
-                <a:bodyPr/>
-                <a:p/>
-              </p:txBody>
             </p:sp>
             <p:sp>
               <p:nvSpPr>
@@ -11038,10 +10806,6 @@
                   <a:round/>
                 </a:ln>
               </p:spPr>
-              <p:txBody xmlns:a="http://schemas.openxmlformats.org/drawingml/2006/main">
-                <a:bodyPr/>
-                <a:p/>
-              </p:txBody>
             </p:sp>
             <p:sp>
               <p:nvSpPr>
@@ -11086,10 +10850,6 @@
                   <a:round/>
                 </a:ln>
               </p:spPr>
-              <p:txBody xmlns:a="http://schemas.openxmlformats.org/drawingml/2006/main">
-                <a:bodyPr/>
-                <a:p/>
-              </p:txBody>
             </p:sp>
             <p:sp>
               <p:nvSpPr>
@@ -11134,10 +10894,6 @@
                   <a:round/>
                 </a:ln>
               </p:spPr>
-              <p:txBody xmlns:a="http://schemas.openxmlformats.org/drawingml/2006/main">
-                <a:bodyPr/>
-                <a:p/>
-              </p:txBody>
             </p:sp>
             <p:sp>
               <p:nvSpPr>
@@ -11182,10 +10938,6 @@
                   <a:round/>
                 </a:ln>
               </p:spPr>
-              <p:txBody xmlns:a="http://schemas.openxmlformats.org/drawingml/2006/main">
-                <a:bodyPr/>
-                <a:p/>
-              </p:txBody>
             </p:sp>
             <p:sp>
               <p:nvSpPr>
@@ -11230,10 +10982,6 @@
                   <a:round/>
                 </a:ln>
               </p:spPr>
-              <p:txBody xmlns:a="http://schemas.openxmlformats.org/drawingml/2006/main">
-                <a:bodyPr/>
-                <a:p/>
-              </p:txBody>
             </p:sp>
             <p:sp>
               <p:nvSpPr>
@@ -11278,10 +11026,6 @@
                   <a:round/>
                 </a:ln>
               </p:spPr>
-              <p:txBody xmlns:a="http://schemas.openxmlformats.org/drawingml/2006/main">
-                <a:bodyPr/>
-                <a:p/>
-              </p:txBody>
             </p:sp>
             <p:sp>
               <p:nvSpPr>
@@ -11326,10 +11070,6 @@
                   <a:round/>
                 </a:ln>
               </p:spPr>
-              <p:txBody xmlns:a="http://schemas.openxmlformats.org/drawingml/2006/main">
-                <a:bodyPr/>
-                <a:p/>
-              </p:txBody>
             </p:sp>
             <p:sp>
               <p:nvSpPr>
@@ -11374,10 +11114,6 @@
                   <a:round/>
                 </a:ln>
               </p:spPr>
-              <p:txBody xmlns:a="http://schemas.openxmlformats.org/drawingml/2006/main">
-                <a:bodyPr/>
-                <a:p/>
-              </p:txBody>
             </p:sp>
             <p:sp>
               <p:nvSpPr>
@@ -11422,10 +11158,6 @@
                   <a:round/>
                 </a:ln>
               </p:spPr>
-              <p:txBody xmlns:a="http://schemas.openxmlformats.org/drawingml/2006/main">
-                <a:bodyPr/>
-                <a:p/>
-              </p:txBody>
             </p:sp>
             <p:sp>
               <p:nvSpPr>
@@ -11470,10 +11202,6 @@
                   <a:round/>
                 </a:ln>
               </p:spPr>
-              <p:txBody xmlns:a="http://schemas.openxmlformats.org/drawingml/2006/main">
-                <a:bodyPr/>
-                <a:p/>
-              </p:txBody>
             </p:sp>
             <p:sp>
               <p:nvSpPr>
@@ -11518,10 +11246,6 @@
                   <a:round/>
                 </a:ln>
               </p:spPr>
-              <p:txBody xmlns:a="http://schemas.openxmlformats.org/drawingml/2006/main">
-                <a:bodyPr/>
-                <a:p/>
-              </p:txBody>
             </p:sp>
           </p:grpSp>
           <p:sp>
@@ -11673,7 +11397,7 @@
                     <a:solidFill>
                       <a:srgbClr val="24272A"/>
                     </a:solidFill>
-                    <a:latin typeface="Times New Roman"/>
+                    <a:latin typeface="Arial"/>
                     <a:ea typeface="Arial"/>
                     <a:cs typeface="Arial"/>
                   </a:rPr>
@@ -11728,10 +11452,6 @@
               <a:effectRef xmlns:a="http://schemas.openxmlformats.org/drawingml/2006/main" idx="11"/>
               <a:fontRef xmlns:a="http://schemas.openxmlformats.org/drawingml/2006/main" idx="major"/>
             </p:style>
-            <p:txBody xmlns:a="http://schemas.openxmlformats.org/drawingml/2006/main">
-              <a:bodyPr/>
-              <a:p/>
-            </p:txBody>
           </p:sp>
           <p:sp>
             <p:nvSpPr>
@@ -11779,10 +11499,6 @@
                 <a:round/>
               </a:ln>
             </p:spPr>
-            <p:txBody xmlns:a="http://schemas.openxmlformats.org/drawingml/2006/main">
-              <a:bodyPr/>
-              <a:p/>
-            </p:txBody>
           </p:sp>
           <p:grpSp>
             <p:nvGrpSpPr>
@@ -11933,10 +11649,6 @@
                   <a:round/>
                 </a:ln>
               </p:spPr>
-              <p:txBody xmlns:a="http://schemas.openxmlformats.org/drawingml/2006/main">
-                <a:bodyPr/>
-                <a:p/>
-              </p:txBody>
             </p:sp>
           </p:grpSp>
           <p:sp>
@@ -12088,7 +11800,7 @@
                     <a:solidFill>
                       <a:srgbClr val="24272A"/>
                     </a:solidFill>
-                    <a:latin typeface="Times New Roman"/>
+                    <a:latin typeface="Arial"/>
                     <a:ea typeface="Arial"/>
                     <a:cs typeface="Arial"/>
                   </a:rPr>
@@ -12246,7 +11958,7 @@
                     <a:solidFill>
                       <a:srgbClr val="626A6F"/>
                     </a:solidFill>
-                    <a:latin typeface="Times New Roman"/>
+                    <a:latin typeface="Arial"/>
                     <a:ea typeface="Arial"/>
                     <a:cs typeface="Arial"/>
                   </a:rPr>
@@ -12316,10 +12028,6 @@
               <a:effectRef xmlns:a="http://schemas.openxmlformats.org/drawingml/2006/main" idx="11"/>
               <a:fontRef xmlns:a="http://schemas.openxmlformats.org/drawingml/2006/main" idx="major"/>
             </p:style>
-            <p:txBody xmlns:a="http://schemas.openxmlformats.org/drawingml/2006/main">
-              <a:bodyPr/>
-              <a:p/>
-            </p:txBody>
           </p:sp>
           <p:sp>
             <p:nvSpPr>
@@ -12367,10 +12075,6 @@
                 <a:round/>
               </a:ln>
             </p:spPr>
-            <p:txBody xmlns:a="http://schemas.openxmlformats.org/drawingml/2006/main">
-              <a:bodyPr/>
-              <a:p/>
-            </p:txBody>
           </p:sp>
           <p:sp>
             <p:nvSpPr>
@@ -12521,7 +12225,7 @@
                     <a:solidFill>
                       <a:srgbClr val="836780"/>
                     </a:solidFill>
-                    <a:latin typeface="Times New Roman"/>
+                    <a:latin typeface="Arial"/>
                     <a:ea typeface="Arial"/>
                     <a:cs typeface="Arial"/>
                   </a:rPr>
@@ -12585,10 +12289,6 @@
               <a:effectRef xmlns:a="http://schemas.openxmlformats.org/drawingml/2006/main" idx="11"/>
               <a:fontRef xmlns:a="http://schemas.openxmlformats.org/drawingml/2006/main" idx="major"/>
             </p:style>
-            <p:txBody xmlns:a="http://schemas.openxmlformats.org/drawingml/2006/main">
-              <a:bodyPr/>
-              <a:p/>
-            </p:txBody>
           </p:sp>
           <p:sp>
             <p:nvSpPr>
@@ -12636,10 +12336,6 @@
                 <a:round/>
               </a:ln>
             </p:spPr>
-            <p:txBody xmlns:a="http://schemas.openxmlformats.org/drawingml/2006/main">
-              <a:bodyPr/>
-              <a:p/>
-            </p:txBody>
           </p:sp>
           <p:sp>
             <p:nvSpPr>
@@ -12687,10 +12383,6 @@
               <a:effectRef xmlns:a="http://schemas.openxmlformats.org/drawingml/2006/main" idx="11"/>
               <a:fontRef xmlns:a="http://schemas.openxmlformats.org/drawingml/2006/main" idx="major"/>
             </p:style>
-            <p:txBody xmlns:a="http://schemas.openxmlformats.org/drawingml/2006/main">
-              <a:bodyPr/>
-              <a:p/>
-            </p:txBody>
           </p:sp>
           <p:sp>
             <p:nvSpPr>
@@ -12738,10 +12430,6 @@
                 <a:round/>
               </a:ln>
             </p:spPr>
-            <p:txBody xmlns:a="http://schemas.openxmlformats.org/drawingml/2006/main">
-              <a:bodyPr/>
-              <a:p/>
-            </p:txBody>
           </p:sp>
           <p:sp>
             <p:nvSpPr>
@@ -12795,10 +12483,6 @@
               <a:effectRef xmlns:a="http://schemas.openxmlformats.org/drawingml/2006/main" idx="11"/>
               <a:fontRef xmlns:a="http://schemas.openxmlformats.org/drawingml/2006/main" idx="major"/>
             </p:style>
-            <p:txBody xmlns:a="http://schemas.openxmlformats.org/drawingml/2006/main">
-              <a:bodyPr/>
-              <a:p/>
-            </p:txBody>
           </p:sp>
           <p:sp>
             <p:nvSpPr>
@@ -12846,10 +12530,6 @@
                 <a:round/>
               </a:ln>
             </p:spPr>
-            <p:txBody xmlns:a="http://schemas.openxmlformats.org/drawingml/2006/main">
-              <a:bodyPr/>
-              <a:p/>
-            </p:txBody>
           </p:sp>
         </p:grpSp>
         <p:grpSp>
@@ -12906,10 +12586,6 @@
                 <a:round/>
               </a:ln>
             </p:spPr>
-            <p:txBody xmlns:a="http://schemas.openxmlformats.org/drawingml/2006/main">
-              <a:bodyPr/>
-              <a:p/>
-            </p:txBody>
           </p:sp>
           <p:sp>
             <p:nvSpPr>
@@ -13060,7 +12736,7 @@
                     <a:solidFill>
                       <a:srgbClr val="24272A"/>
                     </a:solidFill>
-                    <a:latin typeface="Times New Roman"/>
+                    <a:latin typeface="Comic Sans MS"/>
                     <a:ea typeface="Comic Sans MS"/>
                     <a:cs typeface="Comic Sans MS"/>
                   </a:rPr>
@@ -13148,10 +12824,6 @@
                   <a:round/>
                 </a:ln>
               </p:spPr>
-              <p:txBody xmlns:a="http://schemas.openxmlformats.org/drawingml/2006/main">
-                <a:bodyPr/>
-                <a:p/>
-              </p:txBody>
             </p:sp>
             <p:sp>
               <p:nvSpPr>
@@ -13245,10 +12917,6 @@
                   <a:round/>
                 </a:ln>
               </p:spPr>
-              <p:txBody xmlns:a="http://schemas.openxmlformats.org/drawingml/2006/main">
-                <a:bodyPr/>
-                <a:p/>
-              </p:txBody>
             </p:sp>
             <p:sp>
               <p:nvSpPr>
@@ -13290,10 +12958,6 @@
                   <a:round/>
                 </a:ln>
               </p:spPr>
-              <p:txBody xmlns:a="http://schemas.openxmlformats.org/drawingml/2006/main">
-                <a:bodyPr/>
-                <a:p/>
-              </p:txBody>
             </p:sp>
             <p:sp>
               <p:nvSpPr>
@@ -13335,10 +12999,6 @@
                   <a:round/>
                 </a:ln>
               </p:spPr>
-              <p:txBody xmlns:a="http://schemas.openxmlformats.org/drawingml/2006/main">
-                <a:bodyPr/>
-                <a:p/>
-              </p:txBody>
             </p:sp>
             <p:sp>
               <p:nvSpPr>
@@ -13380,10 +13040,6 @@
                   <a:round/>
                 </a:ln>
               </p:spPr>
-              <p:txBody xmlns:a="http://schemas.openxmlformats.org/drawingml/2006/main">
-                <a:bodyPr/>
-                <a:p/>
-              </p:txBody>
             </p:sp>
             <p:sp>
               <p:nvSpPr>
@@ -13425,10 +13081,6 @@
                   <a:round/>
                 </a:ln>
               </p:spPr>
-              <p:txBody xmlns:a="http://schemas.openxmlformats.org/drawingml/2006/main">
-                <a:bodyPr/>
-                <a:p/>
-              </p:txBody>
             </p:sp>
           </p:grpSp>
           <p:sp>
@@ -13580,7 +13232,7 @@
                     <a:solidFill>
                       <a:srgbClr val="24272A"/>
                     </a:solidFill>
-                    <a:latin typeface="Times New Roman"/>
+                    <a:latin typeface="Arial"/>
                     <a:ea typeface="Arial"/>
                     <a:cs typeface="Arial"/>
                   </a:rPr>
@@ -13738,7 +13390,7 @@
                     <a:solidFill>
                       <a:srgbClr val="626A6F"/>
                     </a:solidFill>
-                    <a:latin typeface="Times New Roman"/>
+                    <a:latin typeface="Arial"/>
                     <a:ea typeface="Arial"/>
                     <a:cs typeface="Arial"/>
                   </a:rPr>
@@ -13793,10 +13445,6 @@
               <a:effectRef xmlns:a="http://schemas.openxmlformats.org/drawingml/2006/main" idx="11"/>
               <a:fontRef xmlns:a="http://schemas.openxmlformats.org/drawingml/2006/main" idx="major"/>
             </p:style>
-            <p:txBody xmlns:a="http://schemas.openxmlformats.org/drawingml/2006/main">
-              <a:bodyPr/>
-              <a:p/>
-            </p:txBody>
           </p:sp>
           <p:sp>
             <p:nvSpPr>
@@ -13844,10 +13492,6 @@
                 <a:round/>
               </a:ln>
             </p:spPr>
-            <p:txBody xmlns:a="http://schemas.openxmlformats.org/drawingml/2006/main">
-              <a:bodyPr/>
-              <a:p/>
-            </p:txBody>
           </p:sp>
           <p:grpSp>
             <p:nvGrpSpPr>
@@ -13906,10 +13550,6 @@
                   <a:round/>
                 </a:ln>
               </p:spPr>
-              <p:txBody xmlns:a="http://schemas.openxmlformats.org/drawingml/2006/main">
-                <a:bodyPr/>
-                <a:p/>
-              </p:txBody>
             </p:sp>
             <p:sp>
               <p:nvSpPr>
@@ -13954,10 +13594,6 @@
                   <a:round/>
                 </a:ln>
               </p:spPr>
-              <p:txBody xmlns:a="http://schemas.openxmlformats.org/drawingml/2006/main">
-                <a:bodyPr/>
-                <a:p/>
-              </p:txBody>
             </p:sp>
             <p:sp>
               <p:nvSpPr>
@@ -13999,10 +13635,6 @@
                   <a:round/>
                 </a:ln>
               </p:spPr>
-              <p:txBody xmlns:a="http://schemas.openxmlformats.org/drawingml/2006/main">
-                <a:bodyPr/>
-                <a:p/>
-              </p:txBody>
             </p:sp>
           </p:grpSp>
           <p:sp>
@@ -14154,7 +13786,7 @@
                     <a:solidFill>
                       <a:srgbClr val="24272A"/>
                     </a:solidFill>
-                    <a:latin typeface="Times New Roman"/>
+                    <a:latin typeface="Arial"/>
                     <a:ea typeface="Arial"/>
                     <a:cs typeface="Arial"/>
                   </a:rPr>
@@ -14312,7 +13944,7 @@
                     <a:solidFill>
                       <a:srgbClr val="626A6F"/>
                     </a:solidFill>
-                    <a:latin typeface="Times New Roman"/>
+                    <a:latin typeface="Arial"/>
                     <a:ea typeface="Arial"/>
                     <a:cs typeface="Arial"/>
                   </a:rPr>
@@ -14367,10 +13999,6 @@
               <a:effectRef xmlns:a="http://schemas.openxmlformats.org/drawingml/2006/main" idx="11"/>
               <a:fontRef xmlns:a="http://schemas.openxmlformats.org/drawingml/2006/main" idx="major"/>
             </p:style>
-            <p:txBody xmlns:a="http://schemas.openxmlformats.org/drawingml/2006/main">
-              <a:bodyPr/>
-              <a:p/>
-            </p:txBody>
           </p:sp>
           <p:sp>
             <p:nvSpPr>
@@ -14418,10 +14046,6 @@
                 <a:round/>
               </a:ln>
             </p:spPr>
-            <p:txBody xmlns:a="http://schemas.openxmlformats.org/drawingml/2006/main">
-              <a:bodyPr/>
-              <a:p/>
-            </p:txBody>
           </p:sp>
           <p:grpSp>
             <p:nvGrpSpPr>
@@ -14519,10 +14143,6 @@
                   <a:round/>
                 </a:ln>
               </p:spPr>
-              <p:txBody xmlns:a="http://schemas.openxmlformats.org/drawingml/2006/main">
-                <a:bodyPr/>
-                <a:p/>
-              </p:txBody>
             </p:sp>
             <p:sp>
               <p:nvSpPr>
@@ -14564,10 +14184,6 @@
                   <a:round/>
                 </a:ln>
               </p:spPr>
-              <p:txBody xmlns:a="http://schemas.openxmlformats.org/drawingml/2006/main">
-                <a:bodyPr/>
-                <a:p/>
-              </p:txBody>
             </p:sp>
             <p:sp>
               <p:nvSpPr>
@@ -14609,10 +14225,6 @@
                   <a:round/>
                 </a:ln>
               </p:spPr>
-              <p:txBody xmlns:a="http://schemas.openxmlformats.org/drawingml/2006/main">
-                <a:bodyPr/>
-                <a:p/>
-              </p:txBody>
             </p:sp>
           </p:grpSp>
           <p:sp>
@@ -14764,7 +14376,7 @@
                     <a:solidFill>
                       <a:srgbClr val="24272A"/>
                     </a:solidFill>
-                    <a:latin typeface="Times New Roman"/>
+                    <a:latin typeface="Arial"/>
                     <a:ea typeface="Arial"/>
                     <a:cs typeface="Arial"/>
                   </a:rPr>
@@ -14922,7 +14534,7 @@
                     <a:solidFill>
                       <a:srgbClr val="626A6F"/>
                     </a:solidFill>
-                    <a:latin typeface="Times New Roman"/>
+                    <a:latin typeface="Arial"/>
                     <a:ea typeface="Arial"/>
                     <a:cs typeface="Arial"/>
                   </a:rPr>
@@ -14977,10 +14589,6 @@
               <a:effectRef xmlns:a="http://schemas.openxmlformats.org/drawingml/2006/main" idx="11"/>
               <a:fontRef xmlns:a="http://schemas.openxmlformats.org/drawingml/2006/main" idx="major"/>
             </p:style>
-            <p:txBody xmlns:a="http://schemas.openxmlformats.org/drawingml/2006/main">
-              <a:bodyPr/>
-              <a:p/>
-            </p:txBody>
           </p:sp>
           <p:sp>
             <p:nvSpPr>
@@ -15028,10 +14636,6 @@
                 <a:round/>
               </a:ln>
             </p:spPr>
-            <p:txBody xmlns:a="http://schemas.openxmlformats.org/drawingml/2006/main">
-              <a:bodyPr/>
-              <a:p/>
-            </p:txBody>
           </p:sp>
           <p:grpSp>
             <p:nvGrpSpPr>
@@ -15087,10 +14691,6 @@
                   <a:round/>
                 </a:ln>
               </p:spPr>
-              <p:txBody xmlns:a="http://schemas.openxmlformats.org/drawingml/2006/main">
-                <a:bodyPr/>
-                <a:p/>
-              </p:txBody>
             </p:sp>
             <p:sp>
               <p:nvSpPr>
@@ -15135,10 +14735,6 @@
                   <a:round/>
                 </a:ln>
               </p:spPr>
-              <p:txBody xmlns:a="http://schemas.openxmlformats.org/drawingml/2006/main">
-                <a:bodyPr/>
-                <a:p/>
-              </p:txBody>
             </p:sp>
             <p:sp>
               <p:nvSpPr>
@@ -15230,10 +14826,6 @@
                   <a:round/>
                 </a:ln>
               </p:spPr>
-              <p:txBody xmlns:a="http://schemas.openxmlformats.org/drawingml/2006/main">
-                <a:bodyPr/>
-                <a:p/>
-              </p:txBody>
             </p:sp>
             <p:sp>
               <p:nvSpPr>
@@ -15278,10 +14870,6 @@
                   <a:round/>
                 </a:ln>
               </p:spPr>
-              <p:txBody xmlns:a="http://schemas.openxmlformats.org/drawingml/2006/main">
-                <a:bodyPr/>
-                <a:p/>
-              </p:txBody>
             </p:sp>
             <p:sp>
               <p:nvSpPr>
@@ -15323,10 +14911,6 @@
                   <a:round/>
                 </a:ln>
               </p:spPr>
-              <p:txBody xmlns:a="http://schemas.openxmlformats.org/drawingml/2006/main">
-                <a:bodyPr/>
-                <a:p/>
-              </p:txBody>
             </p:sp>
           </p:grpSp>
           <p:sp>
@@ -15478,7 +15062,7 @@
                     <a:solidFill>
                       <a:srgbClr val="24272A"/>
                     </a:solidFill>
-                    <a:latin typeface="Times New Roman"/>
+                    <a:latin typeface="Arial"/>
                     <a:ea typeface="Arial"/>
                     <a:cs typeface="Arial"/>
                   </a:rPr>
@@ -15636,7 +15220,7 @@
                     <a:solidFill>
                       <a:srgbClr val="626A6F"/>
                     </a:solidFill>
-                    <a:latin typeface="Times New Roman"/>
+                    <a:latin typeface="Arial"/>
                     <a:ea typeface="Arial"/>
                     <a:cs typeface="Arial"/>
                   </a:rPr>
@@ -15700,10 +15284,6 @@
               <a:effectRef xmlns:a="http://schemas.openxmlformats.org/drawingml/2006/main" idx="11"/>
               <a:fontRef xmlns:a="http://schemas.openxmlformats.org/drawingml/2006/main" idx="major"/>
             </p:style>
-            <p:txBody xmlns:a="http://schemas.openxmlformats.org/drawingml/2006/main">
-              <a:bodyPr/>
-              <a:p/>
-            </p:txBody>
           </p:sp>
           <p:sp>
             <p:nvSpPr>
@@ -15751,10 +15331,6 @@
                 <a:round/>
               </a:ln>
             </p:spPr>
-            <p:txBody xmlns:a="http://schemas.openxmlformats.org/drawingml/2006/main">
-              <a:bodyPr/>
-              <a:p/>
-            </p:txBody>
           </p:sp>
           <p:sp>
             <p:nvSpPr>
@@ -15787,10 +15363,6 @@
                 <a:round/>
               </a:ln>
             </p:spPr>
-            <p:txBody xmlns:a="http://schemas.openxmlformats.org/drawingml/2006/main">
-              <a:bodyPr/>
-              <a:p/>
-            </p:txBody>
           </p:sp>
           <p:sp>
             <p:nvSpPr>
@@ -15941,7 +15513,7 @@
                     <a:solidFill>
                       <a:srgbClr val="328372"/>
                     </a:solidFill>
-                    <a:latin typeface="Times New Roman"/>
+                    <a:latin typeface="Arial"/>
                     <a:ea typeface="Arial"/>
                     <a:cs typeface="Arial"/>
                   </a:rPr>
